--- a/PaperFigures/Figure1/SingleStimulation_Schematic.pptx
+++ b/PaperFigures/Figure1/SingleStimulation_Schematic.pptx
@@ -6,6 +6,7 @@
   </p:sldMasterIdLst>
   <p:sldIdLst>
     <p:sldId id="256" r:id="rId2"/>
+    <p:sldId id="258" r:id="rId3"/>
   </p:sldIdLst>
   <p:sldSz cx="14400213" cy="14400213"/>
   <p:notesSz cx="6858000" cy="9144000"/>
@@ -400,7 +401,7 @@
           <a:p>
             <a:fld id="{80965136-E8C9-0546-A038-E0F5549C2278}" type="datetimeFigureOut">
               <a:rPr lang="en-US" smtClean="0"/>
-              <a:t>1/31/25</a:t>
+              <a:t>5/26/2025</a:t>
             </a:fld>
             <a:endParaRPr lang="en-US"/>
           </a:p>
@@ -570,7 +571,7 @@
           <a:p>
             <a:fld id="{80965136-E8C9-0546-A038-E0F5549C2278}" type="datetimeFigureOut">
               <a:rPr lang="en-US" smtClean="0"/>
-              <a:t>1/31/25</a:t>
+              <a:t>5/26/2025</a:t>
             </a:fld>
             <a:endParaRPr lang="en-US"/>
           </a:p>
@@ -750,7 +751,7 @@
           <a:p>
             <a:fld id="{80965136-E8C9-0546-A038-E0F5549C2278}" type="datetimeFigureOut">
               <a:rPr lang="en-US" smtClean="0"/>
-              <a:t>1/31/25</a:t>
+              <a:t>5/26/2025</a:t>
             </a:fld>
             <a:endParaRPr lang="en-US"/>
           </a:p>
@@ -920,7 +921,7 @@
           <a:p>
             <a:fld id="{80965136-E8C9-0546-A038-E0F5549C2278}" type="datetimeFigureOut">
               <a:rPr lang="en-US" smtClean="0"/>
-              <a:t>1/31/25</a:t>
+              <a:t>5/26/2025</a:t>
             </a:fld>
             <a:endParaRPr lang="en-US"/>
           </a:p>
@@ -1166,7 +1167,7 @@
           <a:p>
             <a:fld id="{80965136-E8C9-0546-A038-E0F5549C2278}" type="datetimeFigureOut">
               <a:rPr lang="en-US" smtClean="0"/>
-              <a:t>1/31/25</a:t>
+              <a:t>5/26/2025</a:t>
             </a:fld>
             <a:endParaRPr lang="en-US"/>
           </a:p>
@@ -1398,7 +1399,7 @@
           <a:p>
             <a:fld id="{80965136-E8C9-0546-A038-E0F5549C2278}" type="datetimeFigureOut">
               <a:rPr lang="en-US" smtClean="0"/>
-              <a:t>1/31/25</a:t>
+              <a:t>5/26/2025</a:t>
             </a:fld>
             <a:endParaRPr lang="en-US"/>
           </a:p>
@@ -1765,7 +1766,7 @@
           <a:p>
             <a:fld id="{80965136-E8C9-0546-A038-E0F5549C2278}" type="datetimeFigureOut">
               <a:rPr lang="en-US" smtClean="0"/>
-              <a:t>1/31/25</a:t>
+              <a:t>5/26/2025</a:t>
             </a:fld>
             <a:endParaRPr lang="en-US"/>
           </a:p>
@@ -1883,7 +1884,7 @@
           <a:p>
             <a:fld id="{80965136-E8C9-0546-A038-E0F5549C2278}" type="datetimeFigureOut">
               <a:rPr lang="en-US" smtClean="0"/>
-              <a:t>1/31/25</a:t>
+              <a:t>5/26/2025</a:t>
             </a:fld>
             <a:endParaRPr lang="en-US"/>
           </a:p>
@@ -1978,7 +1979,7 @@
           <a:p>
             <a:fld id="{80965136-E8C9-0546-A038-E0F5549C2278}" type="datetimeFigureOut">
               <a:rPr lang="en-US" smtClean="0"/>
-              <a:t>1/31/25</a:t>
+              <a:t>5/26/2025</a:t>
             </a:fld>
             <a:endParaRPr lang="en-US"/>
           </a:p>
@@ -2255,7 +2256,7 @@
           <a:p>
             <a:fld id="{80965136-E8C9-0546-A038-E0F5549C2278}" type="datetimeFigureOut">
               <a:rPr lang="en-US" smtClean="0"/>
-              <a:t>1/31/25</a:t>
+              <a:t>5/26/2025</a:t>
             </a:fld>
             <a:endParaRPr lang="en-US"/>
           </a:p>
@@ -2512,7 +2513,7 @@
           <a:p>
             <a:fld id="{80965136-E8C9-0546-A038-E0F5549C2278}" type="datetimeFigureOut">
               <a:rPr lang="en-US" smtClean="0"/>
-              <a:t>1/31/25</a:t>
+              <a:t>5/26/2025</a:t>
             </a:fld>
             <a:endParaRPr lang="en-US"/>
           </a:p>
@@ -2725,7 +2726,7 @@
           <a:p>
             <a:fld id="{80965136-E8C9-0546-A038-E0F5549C2278}" type="datetimeFigureOut">
               <a:rPr lang="en-US" smtClean="0"/>
-              <a:t>1/31/25</a:t>
+              <a:t>5/26/2025</a:t>
             </a:fld>
             <a:endParaRPr lang="en-US"/>
           </a:p>
@@ -4451,8 +4452,8 @@
           </p:sp>
         </mc:Fallback>
       </mc:AlternateContent>
-      <mc:AlternateContent xmlns:mc="http://schemas.openxmlformats.org/markup-compatibility/2006">
-        <mc:Choice xmlns:a14="http://schemas.microsoft.com/office/drawing/2010/main" Requires="a14">
+      <mc:AlternateContent xmlns:mc="http://schemas.openxmlformats.org/markup-compatibility/2006" xmlns:a14="http://schemas.microsoft.com/office/drawing/2010/main">
+        <mc:Choice Requires="a14">
           <p:sp>
             <p:nvSpPr>
               <p:cNvPr id="65" name="TextBox 64">
@@ -4548,7 +4549,7 @@
             </p:txBody>
           </p:sp>
         </mc:Choice>
-        <mc:Fallback>
+        <mc:Fallback xmlns="">
           <p:sp>
             <p:nvSpPr>
               <p:cNvPr id="65" name="TextBox 64">
@@ -5631,6 +5632,2549 @@
     <p:extLst>
       <p:ext uri="{BB962C8B-B14F-4D97-AF65-F5344CB8AC3E}">
         <p14:creationId xmlns:p14="http://schemas.microsoft.com/office/powerpoint/2010/main" val="3297373064"/>
+      </p:ext>
+    </p:extLst>
+  </p:cSld>
+  <p:clrMapOvr>
+    <a:masterClrMapping/>
+  </p:clrMapOvr>
+</p:sld>
+</file>
+
+<file path=ppt/slides/slide2.xml><?xml version="1.0" encoding="utf-8"?>
+<p:sld xmlns:a="http://schemas.openxmlformats.org/drawingml/2006/main" xmlns:r="http://schemas.openxmlformats.org/officeDocument/2006/relationships" xmlns:p="http://schemas.openxmlformats.org/presentationml/2006/main">
+  <p:cSld>
+    <p:spTree>
+      <p:nvGrpSpPr>
+        <p:cNvPr id="1" name="">
+          <a:extLst>
+            <a:ext uri="{FF2B5EF4-FFF2-40B4-BE49-F238E27FC236}">
+              <a16:creationId xmlns:a16="http://schemas.microsoft.com/office/drawing/2014/main" id="{5726123C-A91F-1802-8DAE-C2FD2B406AA9}"/>
+            </a:ext>
+          </a:extLst>
+        </p:cNvPr>
+        <p:cNvGrpSpPr/>
+        <p:nvPr/>
+      </p:nvGrpSpPr>
+      <p:grpSpPr>
+        <a:xfrm>
+          <a:off x="0" y="0"/>
+          <a:ext cx="0" cy="0"/>
+          <a:chOff x="0" y="0"/>
+          <a:chExt cx="0" cy="0"/>
+        </a:xfrm>
+      </p:grpSpPr>
+      <p:sp>
+        <p:nvSpPr>
+          <p:cNvPr id="41" name="Oval 40">
+            <a:extLst>
+              <a:ext uri="{FF2B5EF4-FFF2-40B4-BE49-F238E27FC236}">
+                <a16:creationId xmlns:a16="http://schemas.microsoft.com/office/drawing/2014/main" id="{149ED558-68F8-E7A2-1DE1-2BA632B627CF}"/>
+              </a:ext>
+            </a:extLst>
+          </p:cNvPr>
+          <p:cNvSpPr/>
+          <p:nvPr/>
+        </p:nvSpPr>
+        <p:spPr>
+          <a:xfrm>
+            <a:off x="3145710" y="1948092"/>
+            <a:ext cx="6652349" cy="10504028"/>
+          </a:xfrm>
+          <a:prstGeom prst="ellipse">
+            <a:avLst/>
+          </a:prstGeom>
+          <a:solidFill>
+            <a:schemeClr val="bg2"/>
+          </a:solidFill>
+        </p:spPr>
+        <p:style>
+          <a:lnRef idx="2">
+            <a:schemeClr val="accent1">
+              <a:shade val="15000"/>
+            </a:schemeClr>
+          </a:lnRef>
+          <a:fillRef idx="1">
+            <a:schemeClr val="accent1"/>
+          </a:fillRef>
+          <a:effectRef idx="0">
+            <a:schemeClr val="accent1"/>
+          </a:effectRef>
+          <a:fontRef idx="minor">
+            <a:schemeClr val="lt1"/>
+          </a:fontRef>
+        </p:style>
+        <p:txBody>
+          <a:bodyPr rtlCol="0" anchor="ctr"/>
+          <a:lstStyle/>
+          <a:p>
+            <a:pPr algn="ctr"/>
+            <a:endParaRPr lang="en-CA" sz="1380"/>
+          </a:p>
+        </p:txBody>
+      </p:sp>
+      <p:sp>
+        <p:nvSpPr>
+          <p:cNvPr id="42" name="Oval 41">
+            <a:extLst>
+              <a:ext uri="{FF2B5EF4-FFF2-40B4-BE49-F238E27FC236}">
+                <a16:creationId xmlns:a16="http://schemas.microsoft.com/office/drawing/2014/main" id="{46A628AA-B2BA-1F3F-8212-54C009B16E61}"/>
+              </a:ext>
+            </a:extLst>
+          </p:cNvPr>
+          <p:cNvSpPr/>
+          <p:nvPr/>
+        </p:nvSpPr>
+        <p:spPr>
+          <a:xfrm>
+            <a:off x="6638519" y="3063752"/>
+            <a:ext cx="427270" cy="493043"/>
+          </a:xfrm>
+          <a:prstGeom prst="ellipse">
+            <a:avLst/>
+          </a:prstGeom>
+        </p:spPr>
+        <p:style>
+          <a:lnRef idx="2">
+            <a:schemeClr val="accent1">
+              <a:shade val="15000"/>
+            </a:schemeClr>
+          </a:lnRef>
+          <a:fillRef idx="1">
+            <a:schemeClr val="accent1"/>
+          </a:fillRef>
+          <a:effectRef idx="0">
+            <a:schemeClr val="accent1"/>
+          </a:effectRef>
+          <a:fontRef idx="minor">
+            <a:schemeClr val="lt1"/>
+          </a:fontRef>
+        </p:style>
+        <p:txBody>
+          <a:bodyPr rtlCol="0" anchor="ctr"/>
+          <a:lstStyle/>
+          <a:p>
+            <a:pPr algn="ctr"/>
+            <a:endParaRPr lang="en-CA" sz="1380"/>
+          </a:p>
+        </p:txBody>
+      </p:sp>
+      <p:sp>
+        <p:nvSpPr>
+          <p:cNvPr id="43" name="Oval 42">
+            <a:extLst>
+              <a:ext uri="{FF2B5EF4-FFF2-40B4-BE49-F238E27FC236}">
+                <a16:creationId xmlns:a16="http://schemas.microsoft.com/office/drawing/2014/main" id="{BC6C8628-1B09-9193-41F2-25213F1EF31C}"/>
+              </a:ext>
+            </a:extLst>
+          </p:cNvPr>
+          <p:cNvSpPr/>
+          <p:nvPr/>
+        </p:nvSpPr>
+        <p:spPr>
+          <a:xfrm>
+            <a:off x="4830080" y="6244063"/>
+            <a:ext cx="427270" cy="493043"/>
+          </a:xfrm>
+          <a:prstGeom prst="ellipse">
+            <a:avLst/>
+          </a:prstGeom>
+        </p:spPr>
+        <p:style>
+          <a:lnRef idx="2">
+            <a:schemeClr val="accent1">
+              <a:shade val="15000"/>
+            </a:schemeClr>
+          </a:lnRef>
+          <a:fillRef idx="1">
+            <a:schemeClr val="accent1"/>
+          </a:fillRef>
+          <a:effectRef idx="0">
+            <a:schemeClr val="accent1"/>
+          </a:effectRef>
+          <a:fontRef idx="minor">
+            <a:schemeClr val="lt1"/>
+          </a:fontRef>
+        </p:style>
+        <p:txBody>
+          <a:bodyPr rtlCol="0" anchor="ctr"/>
+          <a:lstStyle/>
+          <a:p>
+            <a:pPr algn="ctr"/>
+            <a:endParaRPr lang="en-CA" sz="1380"/>
+          </a:p>
+        </p:txBody>
+      </p:sp>
+      <p:sp>
+        <p:nvSpPr>
+          <p:cNvPr id="44" name="Oval 43">
+            <a:extLst>
+              <a:ext uri="{FF2B5EF4-FFF2-40B4-BE49-F238E27FC236}">
+                <a16:creationId xmlns:a16="http://schemas.microsoft.com/office/drawing/2014/main" id="{11FCDCA2-8C73-59E9-CC3D-C18849B5447F}"/>
+              </a:ext>
+            </a:extLst>
+          </p:cNvPr>
+          <p:cNvSpPr/>
+          <p:nvPr/>
+        </p:nvSpPr>
+        <p:spPr>
+          <a:xfrm>
+            <a:off x="4719069" y="8932095"/>
+            <a:ext cx="427270" cy="493043"/>
+          </a:xfrm>
+          <a:prstGeom prst="ellipse">
+            <a:avLst/>
+          </a:prstGeom>
+        </p:spPr>
+        <p:style>
+          <a:lnRef idx="2">
+            <a:schemeClr val="accent1">
+              <a:shade val="15000"/>
+            </a:schemeClr>
+          </a:lnRef>
+          <a:fillRef idx="1">
+            <a:schemeClr val="accent1"/>
+          </a:fillRef>
+          <a:effectRef idx="0">
+            <a:schemeClr val="accent1"/>
+          </a:effectRef>
+          <a:fontRef idx="minor">
+            <a:schemeClr val="lt1"/>
+          </a:fontRef>
+        </p:style>
+        <p:txBody>
+          <a:bodyPr rtlCol="0" anchor="ctr"/>
+          <a:lstStyle/>
+          <a:p>
+            <a:pPr algn="ctr"/>
+            <a:endParaRPr lang="en-CA" sz="1380"/>
+          </a:p>
+        </p:txBody>
+      </p:sp>
+      <p:sp>
+        <p:nvSpPr>
+          <p:cNvPr id="45" name="Oval 44">
+            <a:extLst>
+              <a:ext uri="{FF2B5EF4-FFF2-40B4-BE49-F238E27FC236}">
+                <a16:creationId xmlns:a16="http://schemas.microsoft.com/office/drawing/2014/main" id="{35EC827C-D0E0-38BC-AE45-B3ED11908B44}"/>
+              </a:ext>
+            </a:extLst>
+          </p:cNvPr>
+          <p:cNvSpPr/>
+          <p:nvPr/>
+        </p:nvSpPr>
+        <p:spPr>
+          <a:xfrm>
+            <a:off x="3794856" y="8292408"/>
+            <a:ext cx="427270" cy="493043"/>
+          </a:xfrm>
+          <a:prstGeom prst="ellipse">
+            <a:avLst/>
+          </a:prstGeom>
+        </p:spPr>
+        <p:style>
+          <a:lnRef idx="2">
+            <a:schemeClr val="accent1">
+              <a:shade val="15000"/>
+            </a:schemeClr>
+          </a:lnRef>
+          <a:fillRef idx="1">
+            <a:schemeClr val="accent1"/>
+          </a:fillRef>
+          <a:effectRef idx="0">
+            <a:schemeClr val="accent1"/>
+          </a:effectRef>
+          <a:fontRef idx="minor">
+            <a:schemeClr val="lt1"/>
+          </a:fontRef>
+        </p:style>
+        <p:txBody>
+          <a:bodyPr rtlCol="0" anchor="ctr"/>
+          <a:lstStyle/>
+          <a:p>
+            <a:pPr algn="ctr"/>
+            <a:endParaRPr lang="en-CA" sz="1380"/>
+          </a:p>
+        </p:txBody>
+      </p:sp>
+      <p:sp>
+        <p:nvSpPr>
+          <p:cNvPr id="46" name="Oval 45">
+            <a:extLst>
+              <a:ext uri="{FF2B5EF4-FFF2-40B4-BE49-F238E27FC236}">
+                <a16:creationId xmlns:a16="http://schemas.microsoft.com/office/drawing/2014/main" id="{2CC3FD65-78C0-763B-9D58-95BB149C4D85}"/>
+              </a:ext>
+            </a:extLst>
+          </p:cNvPr>
+          <p:cNvSpPr/>
+          <p:nvPr/>
+        </p:nvSpPr>
+        <p:spPr>
+          <a:xfrm>
+            <a:off x="4881794" y="4220390"/>
+            <a:ext cx="427270" cy="493043"/>
+          </a:xfrm>
+          <a:prstGeom prst="ellipse">
+            <a:avLst/>
+          </a:prstGeom>
+        </p:spPr>
+        <p:style>
+          <a:lnRef idx="2">
+            <a:schemeClr val="accent1">
+              <a:shade val="15000"/>
+            </a:schemeClr>
+          </a:lnRef>
+          <a:fillRef idx="1">
+            <a:schemeClr val="accent1"/>
+          </a:fillRef>
+          <a:effectRef idx="0">
+            <a:schemeClr val="accent1"/>
+          </a:effectRef>
+          <a:fontRef idx="minor">
+            <a:schemeClr val="lt1"/>
+          </a:fontRef>
+        </p:style>
+        <p:txBody>
+          <a:bodyPr rtlCol="0" anchor="ctr"/>
+          <a:lstStyle/>
+          <a:p>
+            <a:pPr algn="ctr"/>
+            <a:endParaRPr lang="en-CA" sz="1380"/>
+          </a:p>
+        </p:txBody>
+      </p:sp>
+      <p:sp>
+        <p:nvSpPr>
+          <p:cNvPr id="47" name="Oval 46">
+            <a:extLst>
+              <a:ext uri="{FF2B5EF4-FFF2-40B4-BE49-F238E27FC236}">
+                <a16:creationId xmlns:a16="http://schemas.microsoft.com/office/drawing/2014/main" id="{ADAC7C50-980A-0030-BADD-DEF7FD6C67DA}"/>
+              </a:ext>
+            </a:extLst>
+          </p:cNvPr>
+          <p:cNvSpPr/>
+          <p:nvPr/>
+        </p:nvSpPr>
+        <p:spPr>
+          <a:xfrm>
+            <a:off x="7043710" y="6157079"/>
+            <a:ext cx="427270" cy="493043"/>
+          </a:xfrm>
+          <a:prstGeom prst="ellipse">
+            <a:avLst/>
+          </a:prstGeom>
+        </p:spPr>
+        <p:style>
+          <a:lnRef idx="2">
+            <a:schemeClr val="accent1">
+              <a:shade val="15000"/>
+            </a:schemeClr>
+          </a:lnRef>
+          <a:fillRef idx="1">
+            <a:schemeClr val="accent1"/>
+          </a:fillRef>
+          <a:effectRef idx="0">
+            <a:schemeClr val="accent1"/>
+          </a:effectRef>
+          <a:fontRef idx="minor">
+            <a:schemeClr val="lt1"/>
+          </a:fontRef>
+        </p:style>
+        <p:txBody>
+          <a:bodyPr rtlCol="0" anchor="ctr"/>
+          <a:lstStyle/>
+          <a:p>
+            <a:pPr algn="ctr"/>
+            <a:endParaRPr lang="en-CA" sz="1380"/>
+          </a:p>
+        </p:txBody>
+      </p:sp>
+      <p:sp>
+        <p:nvSpPr>
+          <p:cNvPr id="48" name="Oval 47">
+            <a:extLst>
+              <a:ext uri="{FF2B5EF4-FFF2-40B4-BE49-F238E27FC236}">
+                <a16:creationId xmlns:a16="http://schemas.microsoft.com/office/drawing/2014/main" id="{E17DB93E-56DA-75DC-02DF-670BED388B41}"/>
+              </a:ext>
+            </a:extLst>
+          </p:cNvPr>
+          <p:cNvSpPr/>
+          <p:nvPr/>
+        </p:nvSpPr>
+        <p:spPr>
+          <a:xfrm>
+            <a:off x="5293265" y="9767075"/>
+            <a:ext cx="427270" cy="493043"/>
+          </a:xfrm>
+          <a:prstGeom prst="ellipse">
+            <a:avLst/>
+          </a:prstGeom>
+        </p:spPr>
+        <p:style>
+          <a:lnRef idx="2">
+            <a:schemeClr val="accent1">
+              <a:shade val="15000"/>
+            </a:schemeClr>
+          </a:lnRef>
+          <a:fillRef idx="1">
+            <a:schemeClr val="accent1"/>
+          </a:fillRef>
+          <a:effectRef idx="0">
+            <a:schemeClr val="accent1"/>
+          </a:effectRef>
+          <a:fontRef idx="minor">
+            <a:schemeClr val="lt1"/>
+          </a:fontRef>
+        </p:style>
+        <p:txBody>
+          <a:bodyPr rtlCol="0" anchor="ctr"/>
+          <a:lstStyle/>
+          <a:p>
+            <a:pPr algn="ctr"/>
+            <a:endParaRPr lang="en-CA" sz="1380"/>
+          </a:p>
+        </p:txBody>
+      </p:sp>
+      <p:sp>
+        <p:nvSpPr>
+          <p:cNvPr id="49" name="Oval 48">
+            <a:extLst>
+              <a:ext uri="{FF2B5EF4-FFF2-40B4-BE49-F238E27FC236}">
+                <a16:creationId xmlns:a16="http://schemas.microsoft.com/office/drawing/2014/main" id="{9867ECC1-6E17-F711-BD45-CAC064F72B9D}"/>
+              </a:ext>
+            </a:extLst>
+          </p:cNvPr>
+          <p:cNvSpPr/>
+          <p:nvPr/>
+        </p:nvSpPr>
+        <p:spPr>
+          <a:xfrm>
+            <a:off x="7880031" y="9759700"/>
+            <a:ext cx="427270" cy="493043"/>
+          </a:xfrm>
+          <a:prstGeom prst="ellipse">
+            <a:avLst/>
+          </a:prstGeom>
+        </p:spPr>
+        <p:style>
+          <a:lnRef idx="2">
+            <a:schemeClr val="accent1">
+              <a:shade val="15000"/>
+            </a:schemeClr>
+          </a:lnRef>
+          <a:fillRef idx="1">
+            <a:schemeClr val="accent1"/>
+          </a:fillRef>
+          <a:effectRef idx="0">
+            <a:schemeClr val="accent1"/>
+          </a:effectRef>
+          <a:fontRef idx="minor">
+            <a:schemeClr val="lt1"/>
+          </a:fontRef>
+        </p:style>
+        <p:txBody>
+          <a:bodyPr rtlCol="0" anchor="ctr"/>
+          <a:lstStyle/>
+          <a:p>
+            <a:pPr algn="ctr"/>
+            <a:endParaRPr lang="en-CA" sz="1380"/>
+          </a:p>
+        </p:txBody>
+      </p:sp>
+      <p:sp>
+        <p:nvSpPr>
+          <p:cNvPr id="50" name="Oval 49">
+            <a:extLst>
+              <a:ext uri="{FF2B5EF4-FFF2-40B4-BE49-F238E27FC236}">
+                <a16:creationId xmlns:a16="http://schemas.microsoft.com/office/drawing/2014/main" id="{46666773-4B9D-1308-408E-DC0414A68D08}"/>
+              </a:ext>
+            </a:extLst>
+          </p:cNvPr>
+          <p:cNvSpPr/>
+          <p:nvPr/>
+        </p:nvSpPr>
+        <p:spPr>
+          <a:xfrm>
+            <a:off x="7954752" y="7638754"/>
+            <a:ext cx="427270" cy="493043"/>
+          </a:xfrm>
+          <a:prstGeom prst="ellipse">
+            <a:avLst/>
+          </a:prstGeom>
+        </p:spPr>
+        <p:style>
+          <a:lnRef idx="2">
+            <a:schemeClr val="accent1">
+              <a:shade val="15000"/>
+            </a:schemeClr>
+          </a:lnRef>
+          <a:fillRef idx="1">
+            <a:schemeClr val="accent1"/>
+          </a:fillRef>
+          <a:effectRef idx="0">
+            <a:schemeClr val="accent1"/>
+          </a:effectRef>
+          <a:fontRef idx="minor">
+            <a:schemeClr val="lt1"/>
+          </a:fontRef>
+        </p:style>
+        <p:txBody>
+          <a:bodyPr rtlCol="0" anchor="ctr"/>
+          <a:lstStyle/>
+          <a:p>
+            <a:pPr algn="ctr"/>
+            <a:endParaRPr lang="en-CA" sz="1380"/>
+          </a:p>
+        </p:txBody>
+      </p:sp>
+      <p:sp>
+        <p:nvSpPr>
+          <p:cNvPr id="51" name="Oval 50">
+            <a:extLst>
+              <a:ext uri="{FF2B5EF4-FFF2-40B4-BE49-F238E27FC236}">
+                <a16:creationId xmlns:a16="http://schemas.microsoft.com/office/drawing/2014/main" id="{72C99C0E-91A4-FDD6-1138-72CD6DE42205}"/>
+              </a:ext>
+            </a:extLst>
+          </p:cNvPr>
+          <p:cNvSpPr/>
+          <p:nvPr/>
+        </p:nvSpPr>
+        <p:spPr>
+          <a:xfrm>
+            <a:off x="7939092" y="4823825"/>
+            <a:ext cx="427270" cy="493043"/>
+          </a:xfrm>
+          <a:prstGeom prst="ellipse">
+            <a:avLst/>
+          </a:prstGeom>
+        </p:spPr>
+        <p:style>
+          <a:lnRef idx="2">
+            <a:schemeClr val="accent1">
+              <a:shade val="15000"/>
+            </a:schemeClr>
+          </a:lnRef>
+          <a:fillRef idx="1">
+            <a:schemeClr val="accent1"/>
+          </a:fillRef>
+          <a:effectRef idx="0">
+            <a:schemeClr val="accent1"/>
+          </a:effectRef>
+          <a:fontRef idx="minor">
+            <a:schemeClr val="lt1"/>
+          </a:fontRef>
+        </p:style>
+        <p:txBody>
+          <a:bodyPr rtlCol="0" anchor="ctr"/>
+          <a:lstStyle/>
+          <a:p>
+            <a:pPr algn="ctr"/>
+            <a:endParaRPr lang="en-CA" sz="1380"/>
+          </a:p>
+        </p:txBody>
+      </p:sp>
+      <p:sp>
+        <p:nvSpPr>
+          <p:cNvPr id="52" name="Oval 51">
+            <a:extLst>
+              <a:ext uri="{FF2B5EF4-FFF2-40B4-BE49-F238E27FC236}">
+                <a16:creationId xmlns:a16="http://schemas.microsoft.com/office/drawing/2014/main" id="{A7EFC4FF-49FE-0ACA-C0B6-7CF71DF0376B}"/>
+              </a:ext>
+            </a:extLst>
+          </p:cNvPr>
+          <p:cNvSpPr/>
+          <p:nvPr/>
+        </p:nvSpPr>
+        <p:spPr>
+          <a:xfrm>
+            <a:off x="10716493" y="4444612"/>
+            <a:ext cx="3683720" cy="5014402"/>
+          </a:xfrm>
+          <a:prstGeom prst="ellipse">
+            <a:avLst/>
+          </a:prstGeom>
+          <a:solidFill>
+            <a:schemeClr val="bg2"/>
+          </a:solidFill>
+        </p:spPr>
+        <p:style>
+          <a:lnRef idx="2">
+            <a:schemeClr val="accent1">
+              <a:shade val="15000"/>
+            </a:schemeClr>
+          </a:lnRef>
+          <a:fillRef idx="1">
+            <a:schemeClr val="accent1"/>
+          </a:fillRef>
+          <a:effectRef idx="0">
+            <a:schemeClr val="accent1"/>
+          </a:effectRef>
+          <a:fontRef idx="minor">
+            <a:schemeClr val="lt1"/>
+          </a:fontRef>
+        </p:style>
+        <p:txBody>
+          <a:bodyPr rtlCol="0" anchor="ctr"/>
+          <a:lstStyle/>
+          <a:p>
+            <a:pPr algn="ctr"/>
+            <a:endParaRPr lang="en-CA" sz="1380"/>
+          </a:p>
+        </p:txBody>
+      </p:sp>
+      <p:sp>
+        <p:nvSpPr>
+          <p:cNvPr id="53" name="Oval 52">
+            <a:extLst>
+              <a:ext uri="{FF2B5EF4-FFF2-40B4-BE49-F238E27FC236}">
+                <a16:creationId xmlns:a16="http://schemas.microsoft.com/office/drawing/2014/main" id="{F6A4D126-C415-8A55-CF24-61CAD5497519}"/>
+              </a:ext>
+            </a:extLst>
+          </p:cNvPr>
+          <p:cNvSpPr/>
+          <p:nvPr/>
+        </p:nvSpPr>
+        <p:spPr>
+          <a:xfrm>
+            <a:off x="12053186" y="5225754"/>
+            <a:ext cx="427270" cy="493043"/>
+          </a:xfrm>
+          <a:prstGeom prst="ellipse">
+            <a:avLst/>
+          </a:prstGeom>
+          <a:ln>
+            <a:solidFill>
+              <a:schemeClr val="tx1"/>
+            </a:solidFill>
+          </a:ln>
+        </p:spPr>
+        <p:style>
+          <a:lnRef idx="2">
+            <a:schemeClr val="accent1">
+              <a:shade val="15000"/>
+            </a:schemeClr>
+          </a:lnRef>
+          <a:fillRef idx="1">
+            <a:schemeClr val="accent1"/>
+          </a:fillRef>
+          <a:effectRef idx="0">
+            <a:schemeClr val="accent1"/>
+          </a:effectRef>
+          <a:fontRef idx="minor">
+            <a:schemeClr val="lt1"/>
+          </a:fontRef>
+        </p:style>
+        <p:txBody>
+          <a:bodyPr rtlCol="0" anchor="ctr"/>
+          <a:lstStyle/>
+          <a:p>
+            <a:pPr algn="ctr"/>
+            <a:endParaRPr lang="en-CA" sz="1380"/>
+          </a:p>
+        </p:txBody>
+      </p:sp>
+      <p:sp>
+        <p:nvSpPr>
+          <p:cNvPr id="54" name="Oval 53">
+            <a:extLst>
+              <a:ext uri="{FF2B5EF4-FFF2-40B4-BE49-F238E27FC236}">
+                <a16:creationId xmlns:a16="http://schemas.microsoft.com/office/drawing/2014/main" id="{492634A9-BBD7-D63A-DBD6-4B53DB51418E}"/>
+              </a:ext>
+            </a:extLst>
+          </p:cNvPr>
+          <p:cNvSpPr/>
+          <p:nvPr/>
+        </p:nvSpPr>
+        <p:spPr>
+          <a:xfrm>
+            <a:off x="11576663" y="6516049"/>
+            <a:ext cx="427270" cy="493043"/>
+          </a:xfrm>
+          <a:prstGeom prst="ellipse">
+            <a:avLst/>
+          </a:prstGeom>
+        </p:spPr>
+        <p:style>
+          <a:lnRef idx="2">
+            <a:schemeClr val="accent1">
+              <a:shade val="15000"/>
+            </a:schemeClr>
+          </a:lnRef>
+          <a:fillRef idx="1">
+            <a:schemeClr val="accent1"/>
+          </a:fillRef>
+          <a:effectRef idx="0">
+            <a:schemeClr val="accent1"/>
+          </a:effectRef>
+          <a:fontRef idx="minor">
+            <a:schemeClr val="lt1"/>
+          </a:fontRef>
+        </p:style>
+        <p:txBody>
+          <a:bodyPr rtlCol="0" anchor="ctr"/>
+          <a:lstStyle/>
+          <a:p>
+            <a:pPr algn="ctr"/>
+            <a:endParaRPr lang="en-CA" sz="1380"/>
+          </a:p>
+        </p:txBody>
+      </p:sp>
+      <p:sp>
+        <p:nvSpPr>
+          <p:cNvPr id="55" name="Oval 54">
+            <a:extLst>
+              <a:ext uri="{FF2B5EF4-FFF2-40B4-BE49-F238E27FC236}">
+                <a16:creationId xmlns:a16="http://schemas.microsoft.com/office/drawing/2014/main" id="{4DCE5360-1D09-E036-48C7-C07F096E597A}"/>
+              </a:ext>
+            </a:extLst>
+          </p:cNvPr>
+          <p:cNvSpPr/>
+          <p:nvPr/>
+        </p:nvSpPr>
+        <p:spPr>
+          <a:xfrm>
+            <a:off x="11306993" y="7522030"/>
+            <a:ext cx="427270" cy="493043"/>
+          </a:xfrm>
+          <a:prstGeom prst="ellipse">
+            <a:avLst/>
+          </a:prstGeom>
+        </p:spPr>
+        <p:style>
+          <a:lnRef idx="2">
+            <a:schemeClr val="accent1">
+              <a:shade val="15000"/>
+            </a:schemeClr>
+          </a:lnRef>
+          <a:fillRef idx="1">
+            <a:schemeClr val="accent1"/>
+          </a:fillRef>
+          <a:effectRef idx="0">
+            <a:schemeClr val="accent1"/>
+          </a:effectRef>
+          <a:fontRef idx="minor">
+            <a:schemeClr val="lt1"/>
+          </a:fontRef>
+        </p:style>
+        <p:txBody>
+          <a:bodyPr rtlCol="0" anchor="ctr"/>
+          <a:lstStyle/>
+          <a:p>
+            <a:pPr algn="ctr"/>
+            <a:endParaRPr lang="en-CA" sz="1380"/>
+          </a:p>
+        </p:txBody>
+      </p:sp>
+      <p:sp>
+        <p:nvSpPr>
+          <p:cNvPr id="56" name="Oval 55">
+            <a:extLst>
+              <a:ext uri="{FF2B5EF4-FFF2-40B4-BE49-F238E27FC236}">
+                <a16:creationId xmlns:a16="http://schemas.microsoft.com/office/drawing/2014/main" id="{2480C723-7F64-5CB4-638C-2372C0C431B8}"/>
+              </a:ext>
+            </a:extLst>
+          </p:cNvPr>
+          <p:cNvSpPr/>
+          <p:nvPr/>
+        </p:nvSpPr>
+        <p:spPr>
+          <a:xfrm>
+            <a:off x="12354881" y="8484800"/>
+            <a:ext cx="427270" cy="493043"/>
+          </a:xfrm>
+          <a:prstGeom prst="ellipse">
+            <a:avLst/>
+          </a:prstGeom>
+        </p:spPr>
+        <p:style>
+          <a:lnRef idx="2">
+            <a:schemeClr val="accent1">
+              <a:shade val="15000"/>
+            </a:schemeClr>
+          </a:lnRef>
+          <a:fillRef idx="1">
+            <a:schemeClr val="accent1"/>
+          </a:fillRef>
+          <a:effectRef idx="0">
+            <a:schemeClr val="accent1"/>
+          </a:effectRef>
+          <a:fontRef idx="minor">
+            <a:schemeClr val="lt1"/>
+          </a:fontRef>
+        </p:style>
+        <p:txBody>
+          <a:bodyPr rtlCol="0" anchor="ctr"/>
+          <a:lstStyle/>
+          <a:p>
+            <a:pPr algn="ctr"/>
+            <a:endParaRPr lang="en-CA" sz="1380"/>
+          </a:p>
+        </p:txBody>
+      </p:sp>
+      <p:sp>
+        <p:nvSpPr>
+          <p:cNvPr id="57" name="Oval 56">
+            <a:extLst>
+              <a:ext uri="{FF2B5EF4-FFF2-40B4-BE49-F238E27FC236}">
+                <a16:creationId xmlns:a16="http://schemas.microsoft.com/office/drawing/2014/main" id="{26C592D4-2729-50A4-2CB1-4C1351416166}"/>
+              </a:ext>
+            </a:extLst>
+          </p:cNvPr>
+          <p:cNvSpPr/>
+          <p:nvPr/>
+        </p:nvSpPr>
+        <p:spPr>
+          <a:xfrm>
+            <a:off x="12958326" y="7041926"/>
+            <a:ext cx="427270" cy="493043"/>
+          </a:xfrm>
+          <a:prstGeom prst="ellipse">
+            <a:avLst/>
+          </a:prstGeom>
+        </p:spPr>
+        <p:style>
+          <a:lnRef idx="2">
+            <a:schemeClr val="accent1">
+              <a:shade val="15000"/>
+            </a:schemeClr>
+          </a:lnRef>
+          <a:fillRef idx="1">
+            <a:schemeClr val="accent1"/>
+          </a:fillRef>
+          <a:effectRef idx="0">
+            <a:schemeClr val="accent1"/>
+          </a:effectRef>
+          <a:fontRef idx="minor">
+            <a:schemeClr val="lt1"/>
+          </a:fontRef>
+        </p:style>
+        <p:txBody>
+          <a:bodyPr rtlCol="0" anchor="ctr"/>
+          <a:lstStyle/>
+          <a:p>
+            <a:pPr algn="ctr"/>
+            <a:endParaRPr lang="en-CA" sz="1380"/>
+          </a:p>
+        </p:txBody>
+      </p:sp>
+      <p:sp>
+        <p:nvSpPr>
+          <p:cNvPr id="58" name="TextBox 57">
+            <a:extLst>
+              <a:ext uri="{FF2B5EF4-FFF2-40B4-BE49-F238E27FC236}">
+                <a16:creationId xmlns:a16="http://schemas.microsoft.com/office/drawing/2014/main" id="{374AE2FD-DC07-6302-5BEE-95A0C4AB16A2}"/>
+              </a:ext>
+            </a:extLst>
+          </p:cNvPr>
+          <p:cNvSpPr txBox="1"/>
+          <p:nvPr/>
+        </p:nvSpPr>
+        <p:spPr>
+          <a:xfrm>
+            <a:off x="4734341" y="484912"/>
+            <a:ext cx="3336170" cy="1262012"/>
+          </a:xfrm>
+          <a:prstGeom prst="rect">
+            <a:avLst/>
+          </a:prstGeom>
+          <a:noFill/>
+        </p:spPr>
+        <p:txBody>
+          <a:bodyPr wrap="none" rtlCol="0">
+            <a:spAutoFit/>
+          </a:bodyPr>
+          <a:lstStyle/>
+          <a:p>
+            <a:pPr algn="ctr"/>
+            <a:r>
+              <a:rPr lang="en-CA" sz="4800" b="1" dirty="0">
+                <a:latin typeface="Arial" panose="020B0604020202020204" pitchFamily="34" charset="0"/>
+                <a:cs typeface="Arial" panose="020B0604020202020204" pitchFamily="34" charset="0"/>
+              </a:rPr>
+              <a:t>Excitatory </a:t>
+            </a:r>
+          </a:p>
+          <a:p>
+            <a:pPr algn="ctr"/>
+            <a:r>
+              <a:rPr lang="en-CA" sz="2801" b="1" dirty="0">
+                <a:latin typeface="Arial" panose="020B0604020202020204" pitchFamily="34" charset="0"/>
+                <a:cs typeface="Arial" panose="020B0604020202020204" pitchFamily="34" charset="0"/>
+              </a:rPr>
+              <a:t>320 neurons</a:t>
+            </a:r>
+          </a:p>
+        </p:txBody>
+      </p:sp>
+      <p:sp>
+        <p:nvSpPr>
+          <p:cNvPr id="59" name="TextBox 58">
+            <a:extLst>
+              <a:ext uri="{FF2B5EF4-FFF2-40B4-BE49-F238E27FC236}">
+                <a16:creationId xmlns:a16="http://schemas.microsoft.com/office/drawing/2014/main" id="{B0F699B2-8575-9EFF-A9BB-73124E98E223}"/>
+              </a:ext>
+            </a:extLst>
+          </p:cNvPr>
+          <p:cNvSpPr txBox="1"/>
+          <p:nvPr/>
+        </p:nvSpPr>
+        <p:spPr>
+          <a:xfrm>
+            <a:off x="11113400" y="3019821"/>
+            <a:ext cx="2993127" cy="1262012"/>
+          </a:xfrm>
+          <a:prstGeom prst="rect">
+            <a:avLst/>
+          </a:prstGeom>
+          <a:noFill/>
+        </p:spPr>
+        <p:txBody>
+          <a:bodyPr wrap="none" rtlCol="0">
+            <a:spAutoFit/>
+          </a:bodyPr>
+          <a:lstStyle/>
+          <a:p>
+            <a:pPr algn="ctr"/>
+            <a:r>
+              <a:rPr lang="en-CA" sz="4800" b="1" dirty="0">
+                <a:latin typeface="Arial" panose="020B0604020202020204" pitchFamily="34" charset="0"/>
+                <a:cs typeface="Arial" panose="020B0604020202020204" pitchFamily="34" charset="0"/>
+              </a:rPr>
+              <a:t>Inhibitory</a:t>
+            </a:r>
+            <a:br>
+              <a:rPr lang="en-CA" sz="4800" b="1" dirty="0">
+                <a:latin typeface="Arial" panose="020B0604020202020204" pitchFamily="34" charset="0"/>
+                <a:cs typeface="Arial" panose="020B0604020202020204" pitchFamily="34" charset="0"/>
+              </a:rPr>
+            </a:br>
+            <a:r>
+              <a:rPr lang="en-CA" sz="2801" b="1" dirty="0">
+                <a:latin typeface="Arial" panose="020B0604020202020204" pitchFamily="34" charset="0"/>
+                <a:cs typeface="Arial" panose="020B0604020202020204" pitchFamily="34" charset="0"/>
+              </a:rPr>
+              <a:t>80 neurons</a:t>
+            </a:r>
+            <a:endParaRPr lang="en-CA" sz="4800" b="1" dirty="0">
+              <a:latin typeface="Arial" panose="020B0604020202020204" pitchFamily="34" charset="0"/>
+              <a:cs typeface="Arial" panose="020B0604020202020204" pitchFamily="34" charset="0"/>
+            </a:endParaRPr>
+          </a:p>
+        </p:txBody>
+      </p:sp>
+      <p:sp>
+        <p:nvSpPr>
+          <p:cNvPr id="60" name="Arrow: Curved Right 47">
+            <a:extLst>
+              <a:ext uri="{FF2B5EF4-FFF2-40B4-BE49-F238E27FC236}">
+                <a16:creationId xmlns:a16="http://schemas.microsoft.com/office/drawing/2014/main" id="{442A7FDC-D83D-274E-5172-2D4F8D5358B2}"/>
+              </a:ext>
+            </a:extLst>
+          </p:cNvPr>
+          <p:cNvSpPr/>
+          <p:nvPr/>
+        </p:nvSpPr>
+        <p:spPr>
+          <a:xfrm rot="759493">
+            <a:off x="1021997" y="3419324"/>
+            <a:ext cx="2333502" cy="3907453"/>
+          </a:xfrm>
+          <a:prstGeom prst="curvedRightArrow">
+            <a:avLst/>
+          </a:prstGeom>
+          <a:gradFill>
+            <a:gsLst>
+              <a:gs pos="35000">
+                <a:schemeClr val="accent6">
+                  <a:lumMod val="0"/>
+                  <a:lumOff val="100000"/>
+                </a:schemeClr>
+              </a:gs>
+              <a:gs pos="100000">
+                <a:schemeClr val="accent6">
+                  <a:lumMod val="100000"/>
+                </a:schemeClr>
+              </a:gs>
+            </a:gsLst>
+            <a:path path="circle">
+              <a:fillToRect l="50000" t="-80000" r="50000" b="180000"/>
+            </a:path>
+          </a:gradFill>
+          <a:ln>
+            <a:noFill/>
+          </a:ln>
+        </p:spPr>
+        <p:style>
+          <a:lnRef idx="1">
+            <a:schemeClr val="accent5"/>
+          </a:lnRef>
+          <a:fillRef idx="2">
+            <a:schemeClr val="accent5"/>
+          </a:fillRef>
+          <a:effectRef idx="1">
+            <a:schemeClr val="accent5"/>
+          </a:effectRef>
+          <a:fontRef idx="minor">
+            <a:schemeClr val="dk1"/>
+          </a:fontRef>
+        </p:style>
+        <p:txBody>
+          <a:bodyPr rtlCol="0" anchor="ctr"/>
+          <a:lstStyle/>
+          <a:p>
+            <a:pPr algn="ctr"/>
+            <a:endParaRPr lang="en-CA" sz="1380">
+              <a:solidFill>
+                <a:schemeClr val="tx1"/>
+              </a:solidFill>
+            </a:endParaRPr>
+          </a:p>
+        </p:txBody>
+      </p:sp>
+      <p:sp>
+        <p:nvSpPr>
+          <p:cNvPr id="61" name="Arrow: Curved Right 48">
+            <a:extLst>
+              <a:ext uri="{FF2B5EF4-FFF2-40B4-BE49-F238E27FC236}">
+                <a16:creationId xmlns:a16="http://schemas.microsoft.com/office/drawing/2014/main" id="{7F84A920-20D5-930E-60D3-03D87B316DC2}"/>
+              </a:ext>
+            </a:extLst>
+          </p:cNvPr>
+          <p:cNvSpPr/>
+          <p:nvPr/>
+        </p:nvSpPr>
+        <p:spPr>
+          <a:xfrm rot="3746900" flipH="1">
+            <a:off x="10000433" y="8725870"/>
+            <a:ext cx="2617211" cy="6062282"/>
+          </a:xfrm>
+          <a:prstGeom prst="curvedRightArrow">
+            <a:avLst>
+              <a:gd name="adj1" fmla="val 25000"/>
+              <a:gd name="adj2" fmla="val 50000"/>
+              <a:gd name="adj3" fmla="val 25686"/>
+            </a:avLst>
+          </a:prstGeom>
+          <a:solidFill>
+            <a:srgbClr val="7030A0"/>
+          </a:solidFill>
+          <a:ln>
+            <a:noFill/>
+          </a:ln>
+        </p:spPr>
+        <p:style>
+          <a:lnRef idx="1">
+            <a:schemeClr val="accent5"/>
+          </a:lnRef>
+          <a:fillRef idx="2">
+            <a:schemeClr val="accent5"/>
+          </a:fillRef>
+          <a:effectRef idx="1">
+            <a:schemeClr val="accent5"/>
+          </a:effectRef>
+          <a:fontRef idx="minor">
+            <a:schemeClr val="dk1"/>
+          </a:fontRef>
+        </p:style>
+        <p:txBody>
+          <a:bodyPr rtlCol="0" anchor="ctr"/>
+          <a:lstStyle/>
+          <a:p>
+            <a:pPr algn="ctr"/>
+            <a:endParaRPr lang="en-CA" sz="1380">
+              <a:solidFill>
+                <a:schemeClr val="tx1"/>
+              </a:solidFill>
+            </a:endParaRPr>
+          </a:p>
+        </p:txBody>
+      </p:sp>
+      <p:sp>
+        <p:nvSpPr>
+          <p:cNvPr id="62" name="Arrow: Curved Right 49">
+            <a:extLst>
+              <a:ext uri="{FF2B5EF4-FFF2-40B4-BE49-F238E27FC236}">
+                <a16:creationId xmlns:a16="http://schemas.microsoft.com/office/drawing/2014/main" id="{F9DEE03F-7698-E440-E0C1-4E6DFBBF7623}"/>
+              </a:ext>
+            </a:extLst>
+          </p:cNvPr>
+          <p:cNvSpPr/>
+          <p:nvPr/>
+        </p:nvSpPr>
+        <p:spPr>
+          <a:xfrm rot="14602921">
+            <a:off x="9529761" y="8416877"/>
+            <a:ext cx="3075774" cy="7386565"/>
+          </a:xfrm>
+          <a:prstGeom prst="curvedRightArrow">
+            <a:avLst/>
+          </a:prstGeom>
+          <a:solidFill>
+            <a:schemeClr val="accent2"/>
+          </a:solidFill>
+          <a:ln>
+            <a:noFill/>
+          </a:ln>
+        </p:spPr>
+        <p:style>
+          <a:lnRef idx="1">
+            <a:schemeClr val="accent5"/>
+          </a:lnRef>
+          <a:fillRef idx="2">
+            <a:schemeClr val="accent5"/>
+          </a:fillRef>
+          <a:effectRef idx="1">
+            <a:schemeClr val="accent5"/>
+          </a:effectRef>
+          <a:fontRef idx="minor">
+            <a:schemeClr val="dk1"/>
+          </a:fontRef>
+        </p:style>
+        <p:txBody>
+          <a:bodyPr rtlCol="0" anchor="ctr"/>
+          <a:lstStyle/>
+          <a:p>
+            <a:pPr algn="ctr"/>
+            <a:endParaRPr lang="en-CA" sz="1380">
+              <a:solidFill>
+                <a:schemeClr val="tx1"/>
+              </a:solidFill>
+            </a:endParaRPr>
+          </a:p>
+        </p:txBody>
+      </p:sp>
+      <mc:AlternateContent xmlns:mc="http://schemas.openxmlformats.org/markup-compatibility/2006" xmlns:a14="http://schemas.microsoft.com/office/drawing/2010/main">
+        <mc:Choice Requires="a14">
+          <p:sp>
+            <p:nvSpPr>
+              <p:cNvPr id="63" name="TextBox 62">
+                <a:extLst>
+                  <a:ext uri="{FF2B5EF4-FFF2-40B4-BE49-F238E27FC236}">
+                    <a16:creationId xmlns:a16="http://schemas.microsoft.com/office/drawing/2014/main" id="{EDA49C2F-B1BE-FB8D-BB43-B7BA4E135281}"/>
+                  </a:ext>
+                </a:extLst>
+              </p:cNvPr>
+              <p:cNvSpPr txBox="1"/>
+              <p:nvPr/>
+            </p:nvSpPr>
+            <p:spPr>
+              <a:xfrm>
+                <a:off x="9363672" y="10977606"/>
+                <a:ext cx="1212063" cy="830997"/>
+              </a:xfrm>
+              <a:prstGeom prst="rect">
+                <a:avLst/>
+              </a:prstGeom>
+              <a:noFill/>
+            </p:spPr>
+            <p:txBody>
+              <a:bodyPr wrap="none" rtlCol="0">
+                <a:spAutoFit/>
+              </a:bodyPr>
+              <a:lstStyle/>
+              <a:p>
+                <a:pPr algn="ctr"/>
+                <a14:m>
+                  <m:oMathPara xmlns:m="http://schemas.openxmlformats.org/officeDocument/2006/math">
+                    <m:oMathParaPr>
+                      <m:jc m:val="centerGroup"/>
+                    </m:oMathParaPr>
+                    <m:oMath xmlns:m="http://schemas.openxmlformats.org/officeDocument/2006/math">
+                      <m:sSub>
+                        <m:sSubPr>
+                          <m:ctrlPr>
+                            <a:rPr lang="en-CA" sz="4800" b="1" i="1">
+                              <a:latin typeface="Cambria Math" panose="02040503050406030204" pitchFamily="18" charset="0"/>
+                              <a:cs typeface="Arial" panose="020B0604020202020204" pitchFamily="34" charset="0"/>
+                            </a:rPr>
+                          </m:ctrlPr>
+                        </m:sSubPr>
+                        <m:e>
+                          <m:r>
+                            <a:rPr lang="en-CA" sz="4800" b="1" i="1">
+                              <a:latin typeface="Cambria Math" panose="02040503050406030204" pitchFamily="18" charset="0"/>
+                              <a:cs typeface="Arial" panose="020B0604020202020204" pitchFamily="34" charset="0"/>
+                            </a:rPr>
+                            <m:t>𝒈</m:t>
+                          </m:r>
+                        </m:e>
+                        <m:sub>
+                          <m:r>
+                            <a:rPr lang="en-CA" sz="4800" b="1" i="1">
+                              <a:latin typeface="Cambria Math" panose="02040503050406030204" pitchFamily="18" charset="0"/>
+                              <a:cs typeface="Arial" panose="020B0604020202020204" pitchFamily="34" charset="0"/>
+                            </a:rPr>
+                            <m:t>𝒆𝒊</m:t>
+                          </m:r>
+                        </m:sub>
+                      </m:sSub>
+                    </m:oMath>
+                  </m:oMathPara>
+                </a14:m>
+                <a:endParaRPr lang="en-CA" sz="4800" b="1" dirty="0">
+                  <a:latin typeface="Arial" panose="020B0604020202020204" pitchFamily="34" charset="0"/>
+                  <a:cs typeface="Arial" panose="020B0604020202020204" pitchFamily="34" charset="0"/>
+                </a:endParaRPr>
+              </a:p>
+            </p:txBody>
+          </p:sp>
+        </mc:Choice>
+        <mc:Fallback xmlns="">
+          <p:sp>
+            <p:nvSpPr>
+              <p:cNvPr id="63" name="TextBox 62">
+                <a:extLst>
+                  <a:ext uri="{FF2B5EF4-FFF2-40B4-BE49-F238E27FC236}">
+                    <a16:creationId xmlns:a16="http://schemas.microsoft.com/office/drawing/2014/main" id="{106EE281-348D-E132-C52E-9A63D961C500}"/>
+                  </a:ext>
+                </a:extLst>
+              </p:cNvPr>
+              <p:cNvSpPr txBox="1">
+                <a:spLocks noRot="1" noChangeAspect="1" noMove="1" noResize="1" noEditPoints="1" noAdjustHandles="1" noChangeArrowheads="1" noChangeShapeType="1" noTextEdit="1"/>
+              </p:cNvSpPr>
+              <p:nvPr/>
+            </p:nvSpPr>
+            <p:spPr>
+              <a:xfrm>
+                <a:off x="9363672" y="10977606"/>
+                <a:ext cx="1212063" cy="830997"/>
+              </a:xfrm>
+              <a:prstGeom prst="rect">
+                <a:avLst/>
+              </a:prstGeom>
+              <a:blipFill>
+                <a:blip r:embed="rId2"/>
+                <a:stretch>
+                  <a:fillRect l="-10417" b="-19697"/>
+                </a:stretch>
+              </a:blipFill>
+            </p:spPr>
+            <p:txBody>
+              <a:bodyPr/>
+              <a:lstStyle/>
+              <a:p>
+                <a:r>
+                  <a:rPr lang="en-US">
+                    <a:noFill/>
+                  </a:rPr>
+                  <a:t> </a:t>
+                </a:r>
+              </a:p>
+            </p:txBody>
+          </p:sp>
+        </mc:Fallback>
+      </mc:AlternateContent>
+      <mc:AlternateContent xmlns:mc="http://schemas.openxmlformats.org/markup-compatibility/2006" xmlns:a14="http://schemas.microsoft.com/office/drawing/2010/main">
+        <mc:Choice Requires="a14">
+          <p:sp>
+            <p:nvSpPr>
+              <p:cNvPr id="64" name="TextBox 63">
+                <a:extLst>
+                  <a:ext uri="{FF2B5EF4-FFF2-40B4-BE49-F238E27FC236}">
+                    <a16:creationId xmlns:a16="http://schemas.microsoft.com/office/drawing/2014/main" id="{D9A347DE-F1E7-ADC9-A651-4B0308AD8DA1}"/>
+                  </a:ext>
+                </a:extLst>
+              </p:cNvPr>
+              <p:cNvSpPr txBox="1"/>
+              <p:nvPr/>
+            </p:nvSpPr>
+            <p:spPr>
+              <a:xfrm>
+                <a:off x="12652469" y="12602532"/>
+                <a:ext cx="1212063" cy="830997"/>
+              </a:xfrm>
+              <a:prstGeom prst="rect">
+                <a:avLst/>
+              </a:prstGeom>
+              <a:noFill/>
+            </p:spPr>
+            <p:txBody>
+              <a:bodyPr wrap="none" rtlCol="0">
+                <a:spAutoFit/>
+              </a:bodyPr>
+              <a:lstStyle/>
+              <a:p>
+                <a:pPr algn="ctr"/>
+                <a14:m>
+                  <m:oMathPara xmlns:m="http://schemas.openxmlformats.org/officeDocument/2006/math">
+                    <m:oMathParaPr>
+                      <m:jc m:val="centerGroup"/>
+                    </m:oMathParaPr>
+                    <m:oMath xmlns:m="http://schemas.openxmlformats.org/officeDocument/2006/math">
+                      <m:sSub>
+                        <m:sSubPr>
+                          <m:ctrlPr>
+                            <a:rPr lang="en-CA" sz="4800" b="1" i="1">
+                              <a:latin typeface="Cambria Math" panose="02040503050406030204" pitchFamily="18" charset="0"/>
+                              <a:cs typeface="Arial" panose="020B0604020202020204" pitchFamily="34" charset="0"/>
+                            </a:rPr>
+                          </m:ctrlPr>
+                        </m:sSubPr>
+                        <m:e>
+                          <m:r>
+                            <a:rPr lang="en-CA" sz="4800" b="1" i="1">
+                              <a:latin typeface="Cambria Math" panose="02040503050406030204" pitchFamily="18" charset="0"/>
+                              <a:cs typeface="Arial" panose="020B0604020202020204" pitchFamily="34" charset="0"/>
+                            </a:rPr>
+                            <m:t>𝒈</m:t>
+                          </m:r>
+                        </m:e>
+                        <m:sub>
+                          <m:r>
+                            <a:rPr lang="en-CA" sz="4800" b="1" i="1">
+                              <a:latin typeface="Cambria Math" panose="02040503050406030204" pitchFamily="18" charset="0"/>
+                              <a:cs typeface="Arial" panose="020B0604020202020204" pitchFamily="34" charset="0"/>
+                            </a:rPr>
+                            <m:t>𝒊𝒆</m:t>
+                          </m:r>
+                        </m:sub>
+                      </m:sSub>
+                    </m:oMath>
+                  </m:oMathPara>
+                </a14:m>
+                <a:endParaRPr lang="en-CA" sz="4800" b="1" dirty="0">
+                  <a:latin typeface="Arial" panose="020B0604020202020204" pitchFamily="34" charset="0"/>
+                  <a:cs typeface="Arial" panose="020B0604020202020204" pitchFamily="34" charset="0"/>
+                </a:endParaRPr>
+              </a:p>
+            </p:txBody>
+          </p:sp>
+        </mc:Choice>
+        <mc:Fallback xmlns="">
+          <p:sp>
+            <p:nvSpPr>
+              <p:cNvPr id="64" name="TextBox 63">
+                <a:extLst>
+                  <a:ext uri="{FF2B5EF4-FFF2-40B4-BE49-F238E27FC236}">
+                    <a16:creationId xmlns:a16="http://schemas.microsoft.com/office/drawing/2014/main" id="{18A28CE8-1B65-2565-49F3-E95CBA8B1FEE}"/>
+                  </a:ext>
+                </a:extLst>
+              </p:cNvPr>
+              <p:cNvSpPr txBox="1">
+                <a:spLocks noRot="1" noChangeAspect="1" noMove="1" noResize="1" noEditPoints="1" noAdjustHandles="1" noChangeArrowheads="1" noChangeShapeType="1" noTextEdit="1"/>
+              </p:cNvSpPr>
+              <p:nvPr/>
+            </p:nvSpPr>
+            <p:spPr>
+              <a:xfrm>
+                <a:off x="12652469" y="12602532"/>
+                <a:ext cx="1212063" cy="830997"/>
+              </a:xfrm>
+              <a:prstGeom prst="rect">
+                <a:avLst/>
+              </a:prstGeom>
+              <a:blipFill>
+                <a:blip r:embed="rId3"/>
+                <a:stretch>
+                  <a:fillRect l="-10417" b="-19697"/>
+                </a:stretch>
+              </a:blipFill>
+            </p:spPr>
+            <p:txBody>
+              <a:bodyPr/>
+              <a:lstStyle/>
+              <a:p>
+                <a:r>
+                  <a:rPr lang="en-US">
+                    <a:noFill/>
+                  </a:rPr>
+                  <a:t> </a:t>
+                </a:r>
+              </a:p>
+            </p:txBody>
+          </p:sp>
+        </mc:Fallback>
+      </mc:AlternateContent>
+      <mc:AlternateContent xmlns:mc="http://schemas.openxmlformats.org/markup-compatibility/2006" xmlns:a14="http://schemas.microsoft.com/office/drawing/2010/main">
+        <mc:Choice Requires="a14">
+          <p:sp>
+            <p:nvSpPr>
+              <p:cNvPr id="65" name="TextBox 64">
+                <a:extLst>
+                  <a:ext uri="{FF2B5EF4-FFF2-40B4-BE49-F238E27FC236}">
+                    <a16:creationId xmlns:a16="http://schemas.microsoft.com/office/drawing/2014/main" id="{51A66543-B43F-670A-6B44-428762ABB83E}"/>
+                  </a:ext>
+                </a:extLst>
+              </p:cNvPr>
+              <p:cNvSpPr txBox="1"/>
+              <p:nvPr/>
+            </p:nvSpPr>
+            <p:spPr>
+              <a:xfrm>
+                <a:off x="413440" y="2915676"/>
+                <a:ext cx="2060051" cy="830997"/>
+              </a:xfrm>
+              <a:prstGeom prst="rect">
+                <a:avLst/>
+              </a:prstGeom>
+              <a:noFill/>
+            </p:spPr>
+            <p:txBody>
+              <a:bodyPr wrap="square" rtlCol="0">
+                <a:spAutoFit/>
+              </a:bodyPr>
+              <a:lstStyle/>
+              <a:p>
+                <a:pPr algn="ctr"/>
+                <a14:m>
+                  <m:oMathPara xmlns:m="http://schemas.openxmlformats.org/officeDocument/2006/math">
+                    <m:oMathParaPr>
+                      <m:jc m:val="centerGroup"/>
+                    </m:oMathParaPr>
+                    <m:oMath xmlns:m="http://schemas.openxmlformats.org/officeDocument/2006/math">
+                      <m:sSub>
+                        <m:sSubPr>
+                          <m:ctrlPr>
+                            <a:rPr lang="en-CA" sz="4800" b="1" i="1">
+                              <a:latin typeface="Cambria Math" panose="02040503050406030204" pitchFamily="18" charset="0"/>
+                              <a:cs typeface="Arial" panose="020B0604020202020204" pitchFamily="34" charset="0"/>
+                            </a:rPr>
+                          </m:ctrlPr>
+                        </m:sSubPr>
+                        <m:e>
+                          <m:r>
+                            <a:rPr lang="en-CA" sz="4800" b="1" i="1">
+                              <a:latin typeface="Cambria Math" panose="02040503050406030204" pitchFamily="18" charset="0"/>
+                              <a:cs typeface="Arial" panose="020B0604020202020204" pitchFamily="34" charset="0"/>
+                            </a:rPr>
+                            <m:t>𝒈</m:t>
+                          </m:r>
+                        </m:e>
+                        <m:sub>
+                          <m:r>
+                            <a:rPr lang="en-CA" sz="4800" b="1" i="1">
+                              <a:latin typeface="Cambria Math" panose="02040503050406030204" pitchFamily="18" charset="0"/>
+                              <a:cs typeface="Arial" panose="020B0604020202020204" pitchFamily="34" charset="0"/>
+                            </a:rPr>
+                            <m:t>𝒆𝒆</m:t>
+                          </m:r>
+                        </m:sub>
+                      </m:sSub>
+                      <m:r>
+                        <a:rPr lang="en-CA" sz="4800" b="1" i="1">
+                          <a:latin typeface="Cambria Math" panose="02040503050406030204" pitchFamily="18" charset="0"/>
+                          <a:cs typeface="Arial" panose="020B0604020202020204" pitchFamily="34" charset="0"/>
+                        </a:rPr>
+                        <m:t>(</m:t>
+                      </m:r>
+                      <m:r>
+                        <a:rPr lang="en-CA" sz="4800" b="1" i="1">
+                          <a:latin typeface="Cambria Math" panose="02040503050406030204" pitchFamily="18" charset="0"/>
+                          <a:cs typeface="Arial" panose="020B0604020202020204" pitchFamily="34" charset="0"/>
+                        </a:rPr>
+                        <m:t>𝒕</m:t>
+                      </m:r>
+                      <m:r>
+                        <a:rPr lang="en-CA" sz="4800" b="1" i="1">
+                          <a:latin typeface="Cambria Math" panose="02040503050406030204" pitchFamily="18" charset="0"/>
+                          <a:cs typeface="Arial" panose="020B0604020202020204" pitchFamily="34" charset="0"/>
+                        </a:rPr>
+                        <m:t>)</m:t>
+                      </m:r>
+                    </m:oMath>
+                  </m:oMathPara>
+                </a14:m>
+                <a:endParaRPr lang="en-CA" sz="4800" b="1" dirty="0">
+                  <a:latin typeface="Arial" panose="020B0604020202020204" pitchFamily="34" charset="0"/>
+                  <a:cs typeface="Arial" panose="020B0604020202020204" pitchFamily="34" charset="0"/>
+                </a:endParaRPr>
+              </a:p>
+            </p:txBody>
+          </p:sp>
+        </mc:Choice>
+        <mc:Fallback xmlns="">
+          <p:sp>
+            <p:nvSpPr>
+              <p:cNvPr id="65" name="TextBox 64">
+                <a:extLst>
+                  <a:ext uri="{FF2B5EF4-FFF2-40B4-BE49-F238E27FC236}">
+                    <a16:creationId xmlns:a16="http://schemas.microsoft.com/office/drawing/2014/main" id="{85F35BE7-2201-FFB1-A5CE-2DCA9D5005B6}"/>
+                  </a:ext>
+                </a:extLst>
+              </p:cNvPr>
+              <p:cNvSpPr txBox="1">
+                <a:spLocks noRot="1" noChangeAspect="1" noMove="1" noResize="1" noEditPoints="1" noAdjustHandles="1" noChangeArrowheads="1" noChangeShapeType="1" noTextEdit="1"/>
+              </p:cNvSpPr>
+              <p:nvPr/>
+            </p:nvSpPr>
+            <p:spPr>
+              <a:xfrm>
+                <a:off x="413440" y="2915676"/>
+                <a:ext cx="2060051" cy="830997"/>
+              </a:xfrm>
+              <a:prstGeom prst="rect">
+                <a:avLst/>
+              </a:prstGeom>
+              <a:blipFill>
+                <a:blip r:embed="rId4"/>
+                <a:stretch>
+                  <a:fillRect l="-5521" r="-1227" b="-26866"/>
+                </a:stretch>
+              </a:blipFill>
+            </p:spPr>
+            <p:txBody>
+              <a:bodyPr/>
+              <a:lstStyle/>
+              <a:p>
+                <a:r>
+                  <a:rPr lang="en-US">
+                    <a:noFill/>
+                  </a:rPr>
+                  <a:t> </a:t>
+                </a:r>
+              </a:p>
+            </p:txBody>
+          </p:sp>
+        </mc:Fallback>
+      </mc:AlternateContent>
+      <p:cxnSp>
+        <p:nvCxnSpPr>
+          <p:cNvPr id="66" name="Straight Arrow Connector 65">
+            <a:extLst>
+              <a:ext uri="{FF2B5EF4-FFF2-40B4-BE49-F238E27FC236}">
+                <a16:creationId xmlns:a16="http://schemas.microsoft.com/office/drawing/2014/main" id="{C021FB37-00F2-D946-0BA3-FC3F10A789AF}"/>
+              </a:ext>
+            </a:extLst>
+          </p:cNvPr>
+          <p:cNvCxnSpPr>
+            <a:cxnSpLocks/>
+            <a:stCxn id="67" idx="3"/>
+            <a:endCxn id="45" idx="3"/>
+          </p:cNvCxnSpPr>
+          <p:nvPr/>
+        </p:nvCxnSpPr>
+        <p:spPr>
+          <a:xfrm flipV="1">
+            <a:off x="3591869" y="8713247"/>
+            <a:ext cx="265559" cy="3476106"/>
+          </a:xfrm>
+          <a:prstGeom prst="straightConnector1">
+            <a:avLst/>
+          </a:prstGeom>
+          <a:ln w="76200">
+            <a:tailEnd type="triangle"/>
+          </a:ln>
+        </p:spPr>
+        <p:style>
+          <a:lnRef idx="1">
+            <a:schemeClr val="dk1"/>
+          </a:lnRef>
+          <a:fillRef idx="0">
+            <a:schemeClr val="dk1"/>
+          </a:fillRef>
+          <a:effectRef idx="0">
+            <a:schemeClr val="dk1"/>
+          </a:effectRef>
+          <a:fontRef idx="minor">
+            <a:schemeClr val="tx1"/>
+          </a:fontRef>
+        </p:style>
+      </p:cxnSp>
+      <p:sp>
+        <p:nvSpPr>
+          <p:cNvPr id="67" name="TextBox 66">
+            <a:extLst>
+              <a:ext uri="{FF2B5EF4-FFF2-40B4-BE49-F238E27FC236}">
+                <a16:creationId xmlns:a16="http://schemas.microsoft.com/office/drawing/2014/main" id="{E9432BCF-9B58-BB59-E8CB-2DB7EAE3DEBC}"/>
+              </a:ext>
+            </a:extLst>
+          </p:cNvPr>
+          <p:cNvSpPr txBox="1"/>
+          <p:nvPr/>
+        </p:nvSpPr>
+        <p:spPr>
+          <a:xfrm>
+            <a:off x="52117" y="11189079"/>
+            <a:ext cx="3539752" cy="2000548"/>
+          </a:xfrm>
+          <a:prstGeom prst="rect">
+            <a:avLst/>
+          </a:prstGeom>
+          <a:noFill/>
+        </p:spPr>
+        <p:txBody>
+          <a:bodyPr wrap="none" rtlCol="0">
+            <a:spAutoFit/>
+          </a:bodyPr>
+          <a:lstStyle/>
+          <a:p>
+            <a:pPr algn="ctr"/>
+            <a:r>
+              <a:rPr lang="en-CA" sz="4800" b="1" dirty="0">
+                <a:latin typeface="Arial" panose="020B0604020202020204" pitchFamily="34" charset="0"/>
+                <a:cs typeface="Arial" panose="020B0604020202020204" pitchFamily="34" charset="0"/>
+              </a:rPr>
+              <a:t>Targeted</a:t>
+            </a:r>
+            <a:br>
+              <a:rPr lang="en-CA" sz="4800" b="1" dirty="0">
+                <a:latin typeface="Arial" panose="020B0604020202020204" pitchFamily="34" charset="0"/>
+                <a:cs typeface="Arial" panose="020B0604020202020204" pitchFamily="34" charset="0"/>
+              </a:rPr>
+            </a:br>
+            <a:r>
+              <a:rPr lang="en-CA" sz="4800" b="1" dirty="0">
+                <a:latin typeface="Arial" panose="020B0604020202020204" pitchFamily="34" charset="0"/>
+                <a:cs typeface="Arial" panose="020B0604020202020204" pitchFamily="34" charset="0"/>
+              </a:rPr>
+              <a:t>Stimulation</a:t>
+            </a:r>
+          </a:p>
+          <a:p>
+            <a:pPr algn="ctr"/>
+            <a:r>
+              <a:rPr lang="en-CA" sz="2800" dirty="0">
+                <a:latin typeface="Arial" panose="020B0604020202020204" pitchFamily="34" charset="0"/>
+                <a:cs typeface="Arial" panose="020B0604020202020204" pitchFamily="34" charset="0"/>
+              </a:rPr>
+              <a:t>50 neurons</a:t>
+            </a:r>
+            <a:endParaRPr lang="en-CA" sz="2800" b="1" i="1" dirty="0">
+              <a:latin typeface="Cambria Math" panose="02040503050406030204" pitchFamily="18" charset="0"/>
+              <a:cs typeface="Arial" panose="020B0604020202020204" pitchFamily="34" charset="0"/>
+            </a:endParaRPr>
+          </a:p>
+        </p:txBody>
+      </p:sp>
+      <p:sp>
+        <p:nvSpPr>
+          <p:cNvPr id="71" name="Freeform: Shape 68">
+            <a:extLst>
+              <a:ext uri="{FF2B5EF4-FFF2-40B4-BE49-F238E27FC236}">
+                <a16:creationId xmlns:a16="http://schemas.microsoft.com/office/drawing/2014/main" id="{5083B264-5DE3-EA8D-3B49-153DAF6F94E9}"/>
+              </a:ext>
+            </a:extLst>
+          </p:cNvPr>
+          <p:cNvSpPr/>
+          <p:nvPr/>
+        </p:nvSpPr>
+        <p:spPr>
+          <a:xfrm rot="4615309">
+            <a:off x="3178136" y="8296440"/>
+            <a:ext cx="3378718" cy="2366708"/>
+          </a:xfrm>
+          <a:custGeom>
+            <a:avLst/>
+            <a:gdLst>
+              <a:gd name="connsiteX0" fmla="*/ 3314700 w 3373594"/>
+              <a:gd name="connsiteY0" fmla="*/ 476250 h 2343150"/>
+              <a:gd name="connsiteX1" fmla="*/ 3276600 w 3373594"/>
+              <a:gd name="connsiteY1" fmla="*/ 819150 h 2343150"/>
+              <a:gd name="connsiteX2" fmla="*/ 3143250 w 3373594"/>
+              <a:gd name="connsiteY2" fmla="*/ 1047750 h 2343150"/>
+              <a:gd name="connsiteX3" fmla="*/ 3048000 w 3373594"/>
+              <a:gd name="connsiteY3" fmla="*/ 1238250 h 2343150"/>
+              <a:gd name="connsiteX4" fmla="*/ 2952750 w 3373594"/>
+              <a:gd name="connsiteY4" fmla="*/ 1371600 h 2343150"/>
+              <a:gd name="connsiteX5" fmla="*/ 2914650 w 3373594"/>
+              <a:gd name="connsiteY5" fmla="*/ 1428750 h 2343150"/>
+              <a:gd name="connsiteX6" fmla="*/ 2705100 w 3373594"/>
+              <a:gd name="connsiteY6" fmla="*/ 1600200 h 2343150"/>
+              <a:gd name="connsiteX7" fmla="*/ 2552700 w 3373594"/>
+              <a:gd name="connsiteY7" fmla="*/ 1733550 h 2343150"/>
+              <a:gd name="connsiteX8" fmla="*/ 2438400 w 3373594"/>
+              <a:gd name="connsiteY8" fmla="*/ 1790700 h 2343150"/>
+              <a:gd name="connsiteX9" fmla="*/ 2209800 w 3373594"/>
+              <a:gd name="connsiteY9" fmla="*/ 1885950 h 2343150"/>
+              <a:gd name="connsiteX10" fmla="*/ 2114550 w 3373594"/>
+              <a:gd name="connsiteY10" fmla="*/ 1905000 h 2343150"/>
+              <a:gd name="connsiteX11" fmla="*/ 2019300 w 3373594"/>
+              <a:gd name="connsiteY11" fmla="*/ 1943100 h 2343150"/>
+              <a:gd name="connsiteX12" fmla="*/ 1771650 w 3373594"/>
+              <a:gd name="connsiteY12" fmla="*/ 2019300 h 2343150"/>
+              <a:gd name="connsiteX13" fmla="*/ 1676400 w 3373594"/>
+              <a:gd name="connsiteY13" fmla="*/ 2057400 h 2343150"/>
+              <a:gd name="connsiteX14" fmla="*/ 1524000 w 3373594"/>
+              <a:gd name="connsiteY14" fmla="*/ 2095500 h 2343150"/>
+              <a:gd name="connsiteX15" fmla="*/ 1409700 w 3373594"/>
+              <a:gd name="connsiteY15" fmla="*/ 2133600 h 2343150"/>
+              <a:gd name="connsiteX16" fmla="*/ 1276350 w 3373594"/>
+              <a:gd name="connsiteY16" fmla="*/ 2171700 h 2343150"/>
+              <a:gd name="connsiteX17" fmla="*/ 1219200 w 3373594"/>
+              <a:gd name="connsiteY17" fmla="*/ 2190750 h 2343150"/>
+              <a:gd name="connsiteX18" fmla="*/ 1162050 w 3373594"/>
+              <a:gd name="connsiteY18" fmla="*/ 2228850 h 2343150"/>
+              <a:gd name="connsiteX19" fmla="*/ 1085850 w 3373594"/>
+              <a:gd name="connsiteY19" fmla="*/ 2247900 h 2343150"/>
+              <a:gd name="connsiteX20" fmla="*/ 876300 w 3373594"/>
+              <a:gd name="connsiteY20" fmla="*/ 2324100 h 2343150"/>
+              <a:gd name="connsiteX21" fmla="*/ 666750 w 3373594"/>
+              <a:gd name="connsiteY21" fmla="*/ 2343150 h 2343150"/>
+              <a:gd name="connsiteX22" fmla="*/ 266700 w 3373594"/>
+              <a:gd name="connsiteY22" fmla="*/ 2305050 h 2343150"/>
+              <a:gd name="connsiteX23" fmla="*/ 209550 w 3373594"/>
+              <a:gd name="connsiteY23" fmla="*/ 2286000 h 2343150"/>
+              <a:gd name="connsiteX24" fmla="*/ 95250 w 3373594"/>
+              <a:gd name="connsiteY24" fmla="*/ 2209800 h 2343150"/>
+              <a:gd name="connsiteX25" fmla="*/ 57150 w 3373594"/>
+              <a:gd name="connsiteY25" fmla="*/ 2133600 h 2343150"/>
+              <a:gd name="connsiteX26" fmla="*/ 19050 w 3373594"/>
+              <a:gd name="connsiteY26" fmla="*/ 2076450 h 2343150"/>
+              <a:gd name="connsiteX27" fmla="*/ 0 w 3373594"/>
+              <a:gd name="connsiteY27" fmla="*/ 2000250 h 2343150"/>
+              <a:gd name="connsiteX28" fmla="*/ 19050 w 3373594"/>
+              <a:gd name="connsiteY28" fmla="*/ 1447800 h 2343150"/>
+              <a:gd name="connsiteX29" fmla="*/ 57150 w 3373594"/>
+              <a:gd name="connsiteY29" fmla="*/ 1371600 h 2343150"/>
+              <a:gd name="connsiteX30" fmla="*/ 114300 w 3373594"/>
+              <a:gd name="connsiteY30" fmla="*/ 1276350 h 2343150"/>
+              <a:gd name="connsiteX31" fmla="*/ 266700 w 3373594"/>
+              <a:gd name="connsiteY31" fmla="*/ 1143000 h 2343150"/>
+              <a:gd name="connsiteX32" fmla="*/ 342900 w 3373594"/>
+              <a:gd name="connsiteY32" fmla="*/ 1066800 h 2343150"/>
+              <a:gd name="connsiteX33" fmla="*/ 438150 w 3373594"/>
+              <a:gd name="connsiteY33" fmla="*/ 1009650 h 2343150"/>
+              <a:gd name="connsiteX34" fmla="*/ 495300 w 3373594"/>
+              <a:gd name="connsiteY34" fmla="*/ 971550 h 2343150"/>
+              <a:gd name="connsiteX35" fmla="*/ 571500 w 3373594"/>
+              <a:gd name="connsiteY35" fmla="*/ 914400 h 2343150"/>
+              <a:gd name="connsiteX36" fmla="*/ 723900 w 3373594"/>
+              <a:gd name="connsiteY36" fmla="*/ 838200 h 2343150"/>
+              <a:gd name="connsiteX37" fmla="*/ 952500 w 3373594"/>
+              <a:gd name="connsiteY37" fmla="*/ 704850 h 2343150"/>
+              <a:gd name="connsiteX38" fmla="*/ 1085850 w 3373594"/>
+              <a:gd name="connsiteY38" fmla="*/ 628650 h 2343150"/>
+              <a:gd name="connsiteX39" fmla="*/ 1219200 w 3373594"/>
+              <a:gd name="connsiteY39" fmla="*/ 571500 h 2343150"/>
+              <a:gd name="connsiteX40" fmla="*/ 1466850 w 3373594"/>
+              <a:gd name="connsiteY40" fmla="*/ 457200 h 2343150"/>
+              <a:gd name="connsiteX41" fmla="*/ 1695450 w 3373594"/>
+              <a:gd name="connsiteY41" fmla="*/ 323850 h 2343150"/>
+              <a:gd name="connsiteX42" fmla="*/ 1771650 w 3373594"/>
+              <a:gd name="connsiteY42" fmla="*/ 266700 h 2343150"/>
+              <a:gd name="connsiteX43" fmla="*/ 1885950 w 3373594"/>
+              <a:gd name="connsiteY43" fmla="*/ 228600 h 2343150"/>
+              <a:gd name="connsiteX44" fmla="*/ 1981200 w 3373594"/>
+              <a:gd name="connsiteY44" fmla="*/ 190500 h 2343150"/>
+              <a:gd name="connsiteX45" fmla="*/ 2076450 w 3373594"/>
+              <a:gd name="connsiteY45" fmla="*/ 133350 h 2343150"/>
+              <a:gd name="connsiteX46" fmla="*/ 2209800 w 3373594"/>
+              <a:gd name="connsiteY46" fmla="*/ 76200 h 2343150"/>
+              <a:gd name="connsiteX47" fmla="*/ 2552700 w 3373594"/>
+              <a:gd name="connsiteY47" fmla="*/ 19050 h 2343150"/>
+              <a:gd name="connsiteX48" fmla="*/ 2628900 w 3373594"/>
+              <a:gd name="connsiteY48" fmla="*/ 0 h 2343150"/>
+              <a:gd name="connsiteX49" fmla="*/ 3009900 w 3373594"/>
+              <a:gd name="connsiteY49" fmla="*/ 38100 h 2343150"/>
+              <a:gd name="connsiteX50" fmla="*/ 3086100 w 3373594"/>
+              <a:gd name="connsiteY50" fmla="*/ 57150 h 2343150"/>
+              <a:gd name="connsiteX51" fmla="*/ 3162300 w 3373594"/>
+              <a:gd name="connsiteY51" fmla="*/ 95250 h 2343150"/>
+              <a:gd name="connsiteX52" fmla="*/ 3276600 w 3373594"/>
+              <a:gd name="connsiteY52" fmla="*/ 190500 h 2343150"/>
+              <a:gd name="connsiteX53" fmla="*/ 3352800 w 3373594"/>
+              <a:gd name="connsiteY53" fmla="*/ 304800 h 2343150"/>
+              <a:gd name="connsiteX54" fmla="*/ 3333750 w 3373594"/>
+              <a:gd name="connsiteY54" fmla="*/ 533400 h 2343150"/>
+              <a:gd name="connsiteX55" fmla="*/ 3295650 w 3373594"/>
+              <a:gd name="connsiteY55" fmla="*/ 590550 h 2343150"/>
+            </a:gdLst>
+            <a:ahLst/>
+            <a:cxnLst>
+              <a:cxn ang="0">
+                <a:pos x="connsiteX0" y="connsiteY0"/>
+              </a:cxn>
+              <a:cxn ang="0">
+                <a:pos x="connsiteX1" y="connsiteY1"/>
+              </a:cxn>
+              <a:cxn ang="0">
+                <a:pos x="connsiteX2" y="connsiteY2"/>
+              </a:cxn>
+              <a:cxn ang="0">
+                <a:pos x="connsiteX3" y="connsiteY3"/>
+              </a:cxn>
+              <a:cxn ang="0">
+                <a:pos x="connsiteX4" y="connsiteY4"/>
+              </a:cxn>
+              <a:cxn ang="0">
+                <a:pos x="connsiteX5" y="connsiteY5"/>
+              </a:cxn>
+              <a:cxn ang="0">
+                <a:pos x="connsiteX6" y="connsiteY6"/>
+              </a:cxn>
+              <a:cxn ang="0">
+                <a:pos x="connsiteX7" y="connsiteY7"/>
+              </a:cxn>
+              <a:cxn ang="0">
+                <a:pos x="connsiteX8" y="connsiteY8"/>
+              </a:cxn>
+              <a:cxn ang="0">
+                <a:pos x="connsiteX9" y="connsiteY9"/>
+              </a:cxn>
+              <a:cxn ang="0">
+                <a:pos x="connsiteX10" y="connsiteY10"/>
+              </a:cxn>
+              <a:cxn ang="0">
+                <a:pos x="connsiteX11" y="connsiteY11"/>
+              </a:cxn>
+              <a:cxn ang="0">
+                <a:pos x="connsiteX12" y="connsiteY12"/>
+              </a:cxn>
+              <a:cxn ang="0">
+                <a:pos x="connsiteX13" y="connsiteY13"/>
+              </a:cxn>
+              <a:cxn ang="0">
+                <a:pos x="connsiteX14" y="connsiteY14"/>
+              </a:cxn>
+              <a:cxn ang="0">
+                <a:pos x="connsiteX15" y="connsiteY15"/>
+              </a:cxn>
+              <a:cxn ang="0">
+                <a:pos x="connsiteX16" y="connsiteY16"/>
+              </a:cxn>
+              <a:cxn ang="0">
+                <a:pos x="connsiteX17" y="connsiteY17"/>
+              </a:cxn>
+              <a:cxn ang="0">
+                <a:pos x="connsiteX18" y="connsiteY18"/>
+              </a:cxn>
+              <a:cxn ang="0">
+                <a:pos x="connsiteX19" y="connsiteY19"/>
+              </a:cxn>
+              <a:cxn ang="0">
+                <a:pos x="connsiteX20" y="connsiteY20"/>
+              </a:cxn>
+              <a:cxn ang="0">
+                <a:pos x="connsiteX21" y="connsiteY21"/>
+              </a:cxn>
+              <a:cxn ang="0">
+                <a:pos x="connsiteX22" y="connsiteY22"/>
+              </a:cxn>
+              <a:cxn ang="0">
+                <a:pos x="connsiteX23" y="connsiteY23"/>
+              </a:cxn>
+              <a:cxn ang="0">
+                <a:pos x="connsiteX24" y="connsiteY24"/>
+              </a:cxn>
+              <a:cxn ang="0">
+                <a:pos x="connsiteX25" y="connsiteY25"/>
+              </a:cxn>
+              <a:cxn ang="0">
+                <a:pos x="connsiteX26" y="connsiteY26"/>
+              </a:cxn>
+              <a:cxn ang="0">
+                <a:pos x="connsiteX27" y="connsiteY27"/>
+              </a:cxn>
+              <a:cxn ang="0">
+                <a:pos x="connsiteX28" y="connsiteY28"/>
+              </a:cxn>
+              <a:cxn ang="0">
+                <a:pos x="connsiteX29" y="connsiteY29"/>
+              </a:cxn>
+              <a:cxn ang="0">
+                <a:pos x="connsiteX30" y="connsiteY30"/>
+              </a:cxn>
+              <a:cxn ang="0">
+                <a:pos x="connsiteX31" y="connsiteY31"/>
+              </a:cxn>
+              <a:cxn ang="0">
+                <a:pos x="connsiteX32" y="connsiteY32"/>
+              </a:cxn>
+              <a:cxn ang="0">
+                <a:pos x="connsiteX33" y="connsiteY33"/>
+              </a:cxn>
+              <a:cxn ang="0">
+                <a:pos x="connsiteX34" y="connsiteY34"/>
+              </a:cxn>
+              <a:cxn ang="0">
+                <a:pos x="connsiteX35" y="connsiteY35"/>
+              </a:cxn>
+              <a:cxn ang="0">
+                <a:pos x="connsiteX36" y="connsiteY36"/>
+              </a:cxn>
+              <a:cxn ang="0">
+                <a:pos x="connsiteX37" y="connsiteY37"/>
+              </a:cxn>
+              <a:cxn ang="0">
+                <a:pos x="connsiteX38" y="connsiteY38"/>
+              </a:cxn>
+              <a:cxn ang="0">
+                <a:pos x="connsiteX39" y="connsiteY39"/>
+              </a:cxn>
+              <a:cxn ang="0">
+                <a:pos x="connsiteX40" y="connsiteY40"/>
+              </a:cxn>
+              <a:cxn ang="0">
+                <a:pos x="connsiteX41" y="connsiteY41"/>
+              </a:cxn>
+              <a:cxn ang="0">
+                <a:pos x="connsiteX42" y="connsiteY42"/>
+              </a:cxn>
+              <a:cxn ang="0">
+                <a:pos x="connsiteX43" y="connsiteY43"/>
+              </a:cxn>
+              <a:cxn ang="0">
+                <a:pos x="connsiteX44" y="connsiteY44"/>
+              </a:cxn>
+              <a:cxn ang="0">
+                <a:pos x="connsiteX45" y="connsiteY45"/>
+              </a:cxn>
+              <a:cxn ang="0">
+                <a:pos x="connsiteX46" y="connsiteY46"/>
+              </a:cxn>
+              <a:cxn ang="0">
+                <a:pos x="connsiteX47" y="connsiteY47"/>
+              </a:cxn>
+              <a:cxn ang="0">
+                <a:pos x="connsiteX48" y="connsiteY48"/>
+              </a:cxn>
+              <a:cxn ang="0">
+                <a:pos x="connsiteX49" y="connsiteY49"/>
+              </a:cxn>
+              <a:cxn ang="0">
+                <a:pos x="connsiteX50" y="connsiteY50"/>
+              </a:cxn>
+              <a:cxn ang="0">
+                <a:pos x="connsiteX51" y="connsiteY51"/>
+              </a:cxn>
+              <a:cxn ang="0">
+                <a:pos x="connsiteX52" y="connsiteY52"/>
+              </a:cxn>
+              <a:cxn ang="0">
+                <a:pos x="connsiteX53" y="connsiteY53"/>
+              </a:cxn>
+              <a:cxn ang="0">
+                <a:pos x="connsiteX54" y="connsiteY54"/>
+              </a:cxn>
+              <a:cxn ang="0">
+                <a:pos x="connsiteX55" y="connsiteY55"/>
+              </a:cxn>
+            </a:cxnLst>
+            <a:rect l="l" t="t" r="r" b="b"/>
+            <a:pathLst>
+              <a:path w="3373594" h="2343150">
+                <a:moveTo>
+                  <a:pt x="3314700" y="476250"/>
+                </a:moveTo>
+                <a:cubicBezTo>
+                  <a:pt x="3302000" y="590550"/>
+                  <a:pt x="3302460" y="707092"/>
+                  <a:pt x="3276600" y="819150"/>
+                </a:cubicBezTo>
+                <a:cubicBezTo>
+                  <a:pt x="3241530" y="971119"/>
+                  <a:pt x="3203548" y="942229"/>
+                  <a:pt x="3143250" y="1047750"/>
+                </a:cubicBezTo>
+                <a:cubicBezTo>
+                  <a:pt x="3108027" y="1109391"/>
+                  <a:pt x="3087381" y="1179178"/>
+                  <a:pt x="3048000" y="1238250"/>
+                </a:cubicBezTo>
+                <a:cubicBezTo>
+                  <a:pt x="2958210" y="1372935"/>
+                  <a:pt x="3070895" y="1206197"/>
+                  <a:pt x="2952750" y="1371600"/>
+                </a:cubicBezTo>
+                <a:cubicBezTo>
+                  <a:pt x="2939442" y="1390231"/>
+                  <a:pt x="2929307" y="1411161"/>
+                  <a:pt x="2914650" y="1428750"/>
+                </a:cubicBezTo>
+                <a:cubicBezTo>
+                  <a:pt x="2822398" y="1539453"/>
+                  <a:pt x="2855956" y="1449344"/>
+                  <a:pt x="2705100" y="1600200"/>
+                </a:cubicBezTo>
+                <a:cubicBezTo>
+                  <a:pt x="2653872" y="1651428"/>
+                  <a:pt x="2616658" y="1692849"/>
+                  <a:pt x="2552700" y="1733550"/>
+                </a:cubicBezTo>
+                <a:cubicBezTo>
+                  <a:pt x="2516762" y="1756419"/>
+                  <a:pt x="2477326" y="1773400"/>
+                  <a:pt x="2438400" y="1790700"/>
+                </a:cubicBezTo>
+                <a:cubicBezTo>
+                  <a:pt x="2362965" y="1824227"/>
+                  <a:pt x="2290747" y="1869761"/>
+                  <a:pt x="2209800" y="1885950"/>
+                </a:cubicBezTo>
+                <a:cubicBezTo>
+                  <a:pt x="2178050" y="1892300"/>
+                  <a:pt x="2145563" y="1895696"/>
+                  <a:pt x="2114550" y="1905000"/>
+                </a:cubicBezTo>
+                <a:cubicBezTo>
+                  <a:pt x="2081796" y="1914826"/>
+                  <a:pt x="2051741" y="1932286"/>
+                  <a:pt x="2019300" y="1943100"/>
+                </a:cubicBezTo>
+                <a:cubicBezTo>
+                  <a:pt x="1801663" y="2015646"/>
+                  <a:pt x="2158898" y="1864401"/>
+                  <a:pt x="1771650" y="2019300"/>
+                </a:cubicBezTo>
+                <a:cubicBezTo>
+                  <a:pt x="1739900" y="2032000"/>
+                  <a:pt x="1709084" y="2047344"/>
+                  <a:pt x="1676400" y="2057400"/>
+                </a:cubicBezTo>
+                <a:cubicBezTo>
+                  <a:pt x="1626352" y="2072799"/>
+                  <a:pt x="1574349" y="2081115"/>
+                  <a:pt x="1524000" y="2095500"/>
+                </a:cubicBezTo>
+                <a:cubicBezTo>
+                  <a:pt x="1485384" y="2106533"/>
+                  <a:pt x="1448085" y="2121789"/>
+                  <a:pt x="1409700" y="2133600"/>
+                </a:cubicBezTo>
+                <a:cubicBezTo>
+                  <a:pt x="1365516" y="2147195"/>
+                  <a:pt x="1320629" y="2158416"/>
+                  <a:pt x="1276350" y="2171700"/>
+                </a:cubicBezTo>
+                <a:cubicBezTo>
+                  <a:pt x="1257116" y="2177470"/>
+                  <a:pt x="1237161" y="2181770"/>
+                  <a:pt x="1219200" y="2190750"/>
+                </a:cubicBezTo>
+                <a:cubicBezTo>
+                  <a:pt x="1198722" y="2200989"/>
+                  <a:pt x="1183094" y="2219831"/>
+                  <a:pt x="1162050" y="2228850"/>
+                </a:cubicBezTo>
+                <a:cubicBezTo>
+                  <a:pt x="1137985" y="2239163"/>
+                  <a:pt x="1110688" y="2239621"/>
+                  <a:pt x="1085850" y="2247900"/>
+                </a:cubicBezTo>
+                <a:cubicBezTo>
+                  <a:pt x="1021928" y="2269207"/>
+                  <a:pt x="942455" y="2312426"/>
+                  <a:pt x="876300" y="2324100"/>
+                </a:cubicBezTo>
+                <a:cubicBezTo>
+                  <a:pt x="807229" y="2336289"/>
+                  <a:pt x="736600" y="2336800"/>
+                  <a:pt x="666750" y="2343150"/>
+                </a:cubicBezTo>
+                <a:cubicBezTo>
+                  <a:pt x="533400" y="2330450"/>
+                  <a:pt x="399619" y="2321665"/>
+                  <a:pt x="266700" y="2305050"/>
+                </a:cubicBezTo>
+                <a:cubicBezTo>
+                  <a:pt x="246775" y="2302559"/>
+                  <a:pt x="227103" y="2295752"/>
+                  <a:pt x="209550" y="2286000"/>
+                </a:cubicBezTo>
+                <a:cubicBezTo>
+                  <a:pt x="169522" y="2263762"/>
+                  <a:pt x="95250" y="2209800"/>
+                  <a:pt x="95250" y="2209800"/>
+                </a:cubicBezTo>
+                <a:cubicBezTo>
+                  <a:pt x="82550" y="2184400"/>
+                  <a:pt x="71239" y="2158256"/>
+                  <a:pt x="57150" y="2133600"/>
+                </a:cubicBezTo>
+                <a:cubicBezTo>
+                  <a:pt x="45791" y="2113721"/>
+                  <a:pt x="28069" y="2097494"/>
+                  <a:pt x="19050" y="2076450"/>
+                </a:cubicBezTo>
+                <a:cubicBezTo>
+                  <a:pt x="8737" y="2052385"/>
+                  <a:pt x="6350" y="2025650"/>
+                  <a:pt x="0" y="2000250"/>
+                </a:cubicBezTo>
+                <a:cubicBezTo>
+                  <a:pt x="6350" y="1816100"/>
+                  <a:pt x="2368" y="1631303"/>
+                  <a:pt x="19050" y="1447800"/>
+                </a:cubicBezTo>
+                <a:cubicBezTo>
+                  <a:pt x="21621" y="1419519"/>
+                  <a:pt x="43359" y="1396424"/>
+                  <a:pt x="57150" y="1371600"/>
+                </a:cubicBezTo>
+                <a:cubicBezTo>
+                  <a:pt x="75132" y="1339233"/>
+                  <a:pt x="91568" y="1305577"/>
+                  <a:pt x="114300" y="1276350"/>
+                </a:cubicBezTo>
+                <a:cubicBezTo>
+                  <a:pt x="180457" y="1191291"/>
+                  <a:pt x="190484" y="1209689"/>
+                  <a:pt x="266700" y="1143000"/>
+                </a:cubicBezTo>
+                <a:cubicBezTo>
+                  <a:pt x="293733" y="1119346"/>
+                  <a:pt x="314546" y="1088853"/>
+                  <a:pt x="342900" y="1066800"/>
+                </a:cubicBezTo>
+                <a:cubicBezTo>
+                  <a:pt x="372127" y="1044068"/>
+                  <a:pt x="406752" y="1029274"/>
+                  <a:pt x="438150" y="1009650"/>
+                </a:cubicBezTo>
+                <a:cubicBezTo>
+                  <a:pt x="457565" y="997516"/>
+                  <a:pt x="476669" y="984858"/>
+                  <a:pt x="495300" y="971550"/>
+                </a:cubicBezTo>
+                <a:cubicBezTo>
+                  <a:pt x="521136" y="953096"/>
+                  <a:pt x="544075" y="930398"/>
+                  <a:pt x="571500" y="914400"/>
+                </a:cubicBezTo>
+                <a:cubicBezTo>
+                  <a:pt x="620559" y="885782"/>
+                  <a:pt x="674134" y="865571"/>
+                  <a:pt x="723900" y="838200"/>
+                </a:cubicBezTo>
+                <a:cubicBezTo>
+                  <a:pt x="801197" y="795687"/>
+                  <a:pt x="876155" y="749050"/>
+                  <a:pt x="952500" y="704850"/>
+                </a:cubicBezTo>
+                <a:cubicBezTo>
+                  <a:pt x="996806" y="679199"/>
+                  <a:pt x="1038794" y="648817"/>
+                  <a:pt x="1085850" y="628650"/>
+                </a:cubicBezTo>
+                <a:cubicBezTo>
+                  <a:pt x="1130300" y="609600"/>
+                  <a:pt x="1175945" y="593127"/>
+                  <a:pt x="1219200" y="571500"/>
+                </a:cubicBezTo>
+                <a:cubicBezTo>
+                  <a:pt x="1459513" y="451343"/>
+                  <a:pt x="1247427" y="530341"/>
+                  <a:pt x="1466850" y="457200"/>
+                </a:cubicBezTo>
+                <a:cubicBezTo>
+                  <a:pt x="1856534" y="178855"/>
+                  <a:pt x="1406434" y="484415"/>
+                  <a:pt x="1695450" y="323850"/>
+                </a:cubicBezTo>
+                <a:cubicBezTo>
+                  <a:pt x="1723204" y="308431"/>
+                  <a:pt x="1743252" y="280899"/>
+                  <a:pt x="1771650" y="266700"/>
+                </a:cubicBezTo>
+                <a:cubicBezTo>
+                  <a:pt x="1807571" y="248739"/>
+                  <a:pt x="1848207" y="242325"/>
+                  <a:pt x="1885950" y="228600"/>
+                </a:cubicBezTo>
+                <a:cubicBezTo>
+                  <a:pt x="1918087" y="216914"/>
+                  <a:pt x="1950614" y="205793"/>
+                  <a:pt x="1981200" y="190500"/>
+                </a:cubicBezTo>
+                <a:cubicBezTo>
+                  <a:pt x="2014318" y="173941"/>
+                  <a:pt x="2044083" y="151332"/>
+                  <a:pt x="2076450" y="133350"/>
+                </a:cubicBezTo>
+                <a:cubicBezTo>
+                  <a:pt x="2113798" y="112601"/>
+                  <a:pt x="2165882" y="85611"/>
+                  <a:pt x="2209800" y="76200"/>
+                </a:cubicBezTo>
+                <a:cubicBezTo>
+                  <a:pt x="2596164" y="-6592"/>
+                  <a:pt x="2265181" y="71326"/>
+                  <a:pt x="2552700" y="19050"/>
+                </a:cubicBezTo>
+                <a:cubicBezTo>
+                  <a:pt x="2578459" y="14366"/>
+                  <a:pt x="2603500" y="6350"/>
+                  <a:pt x="2628900" y="0"/>
+                </a:cubicBezTo>
+                <a:cubicBezTo>
+                  <a:pt x="2755900" y="12700"/>
+                  <a:pt x="2883252" y="22269"/>
+                  <a:pt x="3009900" y="38100"/>
+                </a:cubicBezTo>
+                <a:cubicBezTo>
+                  <a:pt x="3035880" y="41347"/>
+                  <a:pt x="3061585" y="47957"/>
+                  <a:pt x="3086100" y="57150"/>
+                </a:cubicBezTo>
+                <a:cubicBezTo>
+                  <a:pt x="3112690" y="67121"/>
+                  <a:pt x="3137644" y="81161"/>
+                  <a:pt x="3162300" y="95250"/>
+                </a:cubicBezTo>
+                <a:cubicBezTo>
+                  <a:pt x="3206327" y="120408"/>
+                  <a:pt x="3245080" y="149974"/>
+                  <a:pt x="3276600" y="190500"/>
+                </a:cubicBezTo>
+                <a:cubicBezTo>
+                  <a:pt x="3304713" y="226645"/>
+                  <a:pt x="3352800" y="304800"/>
+                  <a:pt x="3352800" y="304800"/>
+                </a:cubicBezTo>
+                <a:cubicBezTo>
+                  <a:pt x="3380434" y="415337"/>
+                  <a:pt x="3386431" y="388526"/>
+                  <a:pt x="3333750" y="533400"/>
+                </a:cubicBezTo>
+                <a:cubicBezTo>
+                  <a:pt x="3325926" y="554917"/>
+                  <a:pt x="3295650" y="590550"/>
+                  <a:pt x="3295650" y="590550"/>
+                </a:cubicBezTo>
+              </a:path>
+            </a:pathLst>
+          </a:custGeom>
+          <a:noFill/>
+          <a:ln w="76200">
+            <a:solidFill>
+              <a:schemeClr val="tx1"/>
+            </a:solidFill>
+            <a:prstDash val="sysDot"/>
+          </a:ln>
+        </p:spPr>
+        <p:style>
+          <a:lnRef idx="1">
+            <a:schemeClr val="accent5"/>
+          </a:lnRef>
+          <a:fillRef idx="2">
+            <a:schemeClr val="accent5"/>
+          </a:fillRef>
+          <a:effectRef idx="1">
+            <a:schemeClr val="accent5"/>
+          </a:effectRef>
+          <a:fontRef idx="minor">
+            <a:schemeClr val="dk1"/>
+          </a:fontRef>
+        </p:style>
+        <p:txBody>
+          <a:bodyPr rtlCol="0" anchor="ctr"/>
+          <a:lstStyle/>
+          <a:p>
+            <a:pPr algn="ctr"/>
+            <a:endParaRPr lang="en-CA" sz="1114"/>
+          </a:p>
+        </p:txBody>
+      </p:sp>
+      <p:cxnSp>
+        <p:nvCxnSpPr>
+          <p:cNvPr id="72" name="Straight Arrow Connector 71">
+            <a:extLst>
+              <a:ext uri="{FF2B5EF4-FFF2-40B4-BE49-F238E27FC236}">
+                <a16:creationId xmlns:a16="http://schemas.microsoft.com/office/drawing/2014/main" id="{A36E3BBF-6F22-AC1E-23BF-0A264CE09632}"/>
+              </a:ext>
+            </a:extLst>
+          </p:cNvPr>
+          <p:cNvCxnSpPr>
+            <a:cxnSpLocks/>
+            <a:stCxn id="67" idx="3"/>
+            <a:endCxn id="48" idx="3"/>
+          </p:cNvCxnSpPr>
+          <p:nvPr/>
+        </p:nvCxnSpPr>
+        <p:spPr>
+          <a:xfrm flipV="1">
+            <a:off x="3591869" y="10187914"/>
+            <a:ext cx="1763968" cy="2001439"/>
+          </a:xfrm>
+          <a:prstGeom prst="straightConnector1">
+            <a:avLst/>
+          </a:prstGeom>
+          <a:ln w="76200">
+            <a:tailEnd type="triangle"/>
+          </a:ln>
+        </p:spPr>
+        <p:style>
+          <a:lnRef idx="1">
+            <a:schemeClr val="dk1"/>
+          </a:lnRef>
+          <a:fillRef idx="0">
+            <a:schemeClr val="dk1"/>
+          </a:fillRef>
+          <a:effectRef idx="0">
+            <a:schemeClr val="dk1"/>
+          </a:effectRef>
+          <a:fontRef idx="minor">
+            <a:schemeClr val="tx1"/>
+          </a:fontRef>
+        </p:style>
+      </p:cxnSp>
+      <p:cxnSp>
+        <p:nvCxnSpPr>
+          <p:cNvPr id="73" name="Straight Arrow Connector 72">
+            <a:extLst>
+              <a:ext uri="{FF2B5EF4-FFF2-40B4-BE49-F238E27FC236}">
+                <a16:creationId xmlns:a16="http://schemas.microsoft.com/office/drawing/2014/main" id="{D1C5223A-DC8A-F19D-6360-9B03E9710C63}"/>
+              </a:ext>
+            </a:extLst>
+          </p:cNvPr>
+          <p:cNvCxnSpPr>
+            <a:cxnSpLocks/>
+            <a:stCxn id="67" idx="3"/>
+            <a:endCxn id="44" idx="3"/>
+          </p:cNvCxnSpPr>
+          <p:nvPr/>
+        </p:nvCxnSpPr>
+        <p:spPr>
+          <a:xfrm flipV="1">
+            <a:off x="3591869" y="9352934"/>
+            <a:ext cx="1189772" cy="2836419"/>
+          </a:xfrm>
+          <a:prstGeom prst="straightConnector1">
+            <a:avLst/>
+          </a:prstGeom>
+          <a:ln w="76200">
+            <a:tailEnd type="triangle"/>
+          </a:ln>
+        </p:spPr>
+        <p:style>
+          <a:lnRef idx="1">
+            <a:schemeClr val="dk1"/>
+          </a:lnRef>
+          <a:fillRef idx="0">
+            <a:schemeClr val="dk1"/>
+          </a:fillRef>
+          <a:effectRef idx="0">
+            <a:schemeClr val="dk1"/>
+          </a:effectRef>
+          <a:fontRef idx="minor">
+            <a:schemeClr val="tx1"/>
+          </a:fontRef>
+        </p:style>
+      </p:cxnSp>
+      <p:sp>
+        <p:nvSpPr>
+          <p:cNvPr id="74" name="Oval 73">
+            <a:extLst>
+              <a:ext uri="{FF2B5EF4-FFF2-40B4-BE49-F238E27FC236}">
+                <a16:creationId xmlns:a16="http://schemas.microsoft.com/office/drawing/2014/main" id="{36C03480-8024-671E-076A-D6EE666C127B}"/>
+              </a:ext>
+            </a:extLst>
+          </p:cNvPr>
+          <p:cNvSpPr/>
+          <p:nvPr/>
+        </p:nvSpPr>
+        <p:spPr>
+          <a:xfrm>
+            <a:off x="6260854" y="6912773"/>
+            <a:ext cx="427270" cy="493043"/>
+          </a:xfrm>
+          <a:prstGeom prst="ellipse">
+            <a:avLst/>
+          </a:prstGeom>
+        </p:spPr>
+        <p:style>
+          <a:lnRef idx="2">
+            <a:schemeClr val="accent1">
+              <a:shade val="15000"/>
+            </a:schemeClr>
+          </a:lnRef>
+          <a:fillRef idx="1">
+            <a:schemeClr val="accent1"/>
+          </a:fillRef>
+          <a:effectRef idx="0">
+            <a:schemeClr val="accent1"/>
+          </a:effectRef>
+          <a:fontRef idx="minor">
+            <a:schemeClr val="lt1"/>
+          </a:fontRef>
+        </p:style>
+        <p:txBody>
+          <a:bodyPr rtlCol="0" anchor="ctr"/>
+          <a:lstStyle/>
+          <a:p>
+            <a:pPr algn="ctr"/>
+            <a:endParaRPr lang="en-CA" sz="1380"/>
+          </a:p>
+        </p:txBody>
+      </p:sp>
+      <p:sp>
+        <p:nvSpPr>
+          <p:cNvPr id="75" name="Oval 74">
+            <a:extLst>
+              <a:ext uri="{FF2B5EF4-FFF2-40B4-BE49-F238E27FC236}">
+                <a16:creationId xmlns:a16="http://schemas.microsoft.com/office/drawing/2014/main" id="{6E0BC926-D794-66B0-CEAC-2D1921EBD0AF}"/>
+              </a:ext>
+            </a:extLst>
+          </p:cNvPr>
+          <p:cNvSpPr/>
+          <p:nvPr/>
+        </p:nvSpPr>
+        <p:spPr>
+          <a:xfrm>
+            <a:off x="5675027" y="3779176"/>
+            <a:ext cx="427270" cy="493043"/>
+          </a:xfrm>
+          <a:prstGeom prst="ellipse">
+            <a:avLst/>
+          </a:prstGeom>
+        </p:spPr>
+        <p:style>
+          <a:lnRef idx="2">
+            <a:schemeClr val="accent1">
+              <a:shade val="15000"/>
+            </a:schemeClr>
+          </a:lnRef>
+          <a:fillRef idx="1">
+            <a:schemeClr val="accent1"/>
+          </a:fillRef>
+          <a:effectRef idx="0">
+            <a:schemeClr val="accent1"/>
+          </a:effectRef>
+          <a:fontRef idx="minor">
+            <a:schemeClr val="lt1"/>
+          </a:fontRef>
+        </p:style>
+        <p:txBody>
+          <a:bodyPr rtlCol="0" anchor="ctr"/>
+          <a:lstStyle/>
+          <a:p>
+            <a:pPr algn="ctr"/>
+            <a:endParaRPr lang="en-CA" sz="1380"/>
+          </a:p>
+        </p:txBody>
+      </p:sp>
+      <p:sp>
+        <p:nvSpPr>
+          <p:cNvPr id="2" name="Oval 1">
+            <a:extLst>
+              <a:ext uri="{FF2B5EF4-FFF2-40B4-BE49-F238E27FC236}">
+                <a16:creationId xmlns:a16="http://schemas.microsoft.com/office/drawing/2014/main" id="{27F5ED0C-C311-DB0F-3109-2E8FC8A6BA72}"/>
+              </a:ext>
+            </a:extLst>
+          </p:cNvPr>
+          <p:cNvSpPr/>
+          <p:nvPr/>
+        </p:nvSpPr>
+        <p:spPr>
+          <a:xfrm>
+            <a:off x="6603198" y="8533759"/>
+            <a:ext cx="427270" cy="493043"/>
+          </a:xfrm>
+          <a:prstGeom prst="ellipse">
+            <a:avLst/>
+          </a:prstGeom>
+        </p:spPr>
+        <p:style>
+          <a:lnRef idx="2">
+            <a:schemeClr val="accent1">
+              <a:shade val="15000"/>
+            </a:schemeClr>
+          </a:lnRef>
+          <a:fillRef idx="1">
+            <a:schemeClr val="accent1"/>
+          </a:fillRef>
+          <a:effectRef idx="0">
+            <a:schemeClr val="accent1"/>
+          </a:effectRef>
+          <a:fontRef idx="minor">
+            <a:schemeClr val="lt1"/>
+          </a:fontRef>
+        </p:style>
+        <p:txBody>
+          <a:bodyPr rtlCol="0" anchor="ctr"/>
+          <a:lstStyle/>
+          <a:p>
+            <a:pPr algn="ctr"/>
+            <a:endParaRPr lang="en-CA" sz="1380"/>
+          </a:p>
+        </p:txBody>
+      </p:sp>
+      <p:sp>
+        <p:nvSpPr>
+          <p:cNvPr id="3" name="Oval 2">
+            <a:extLst>
+              <a:ext uri="{FF2B5EF4-FFF2-40B4-BE49-F238E27FC236}">
+                <a16:creationId xmlns:a16="http://schemas.microsoft.com/office/drawing/2014/main" id="{A50A3C82-ABD5-0C0D-5157-E633FE36F568}"/>
+              </a:ext>
+            </a:extLst>
+          </p:cNvPr>
+          <p:cNvSpPr/>
+          <p:nvPr/>
+        </p:nvSpPr>
+        <p:spPr>
+          <a:xfrm>
+            <a:off x="6389563" y="4861919"/>
+            <a:ext cx="427270" cy="493043"/>
+          </a:xfrm>
+          <a:prstGeom prst="ellipse">
+            <a:avLst/>
+          </a:prstGeom>
+        </p:spPr>
+        <p:style>
+          <a:lnRef idx="2">
+            <a:schemeClr val="accent1">
+              <a:shade val="15000"/>
+            </a:schemeClr>
+          </a:lnRef>
+          <a:fillRef idx="1">
+            <a:schemeClr val="accent1"/>
+          </a:fillRef>
+          <a:effectRef idx="0">
+            <a:schemeClr val="accent1"/>
+          </a:effectRef>
+          <a:fontRef idx="minor">
+            <a:schemeClr val="lt1"/>
+          </a:fontRef>
+        </p:style>
+        <p:txBody>
+          <a:bodyPr rtlCol="0" anchor="ctr"/>
+          <a:lstStyle/>
+          <a:p>
+            <a:pPr algn="ctr"/>
+            <a:endParaRPr lang="en-CA" sz="1380"/>
+          </a:p>
+        </p:txBody>
+      </p:sp>
+      <p:sp>
+        <p:nvSpPr>
+          <p:cNvPr id="4" name="Oval 3">
+            <a:extLst>
+              <a:ext uri="{FF2B5EF4-FFF2-40B4-BE49-F238E27FC236}">
+                <a16:creationId xmlns:a16="http://schemas.microsoft.com/office/drawing/2014/main" id="{794336F6-BF9B-ACED-5778-A31FBA18D01F}"/>
+              </a:ext>
+            </a:extLst>
+          </p:cNvPr>
+          <p:cNvSpPr/>
+          <p:nvPr/>
+        </p:nvSpPr>
+        <p:spPr>
+          <a:xfrm>
+            <a:off x="6558098" y="10995665"/>
+            <a:ext cx="427270" cy="493043"/>
+          </a:xfrm>
+          <a:prstGeom prst="ellipse">
+            <a:avLst/>
+          </a:prstGeom>
+        </p:spPr>
+        <p:style>
+          <a:lnRef idx="2">
+            <a:schemeClr val="accent1">
+              <a:shade val="15000"/>
+            </a:schemeClr>
+          </a:lnRef>
+          <a:fillRef idx="1">
+            <a:schemeClr val="accent1"/>
+          </a:fillRef>
+          <a:effectRef idx="0">
+            <a:schemeClr val="accent1"/>
+          </a:effectRef>
+          <a:fontRef idx="minor">
+            <a:schemeClr val="lt1"/>
+          </a:fontRef>
+        </p:style>
+        <p:txBody>
+          <a:bodyPr rtlCol="0" anchor="ctr"/>
+          <a:lstStyle/>
+          <a:p>
+            <a:pPr algn="ctr"/>
+            <a:endParaRPr lang="en-CA" sz="1380"/>
+          </a:p>
+        </p:txBody>
+      </p:sp>
+    </p:spTree>
+    <p:extLst>
+      <p:ext uri="{BB962C8B-B14F-4D97-AF65-F5344CB8AC3E}">
+        <p14:creationId xmlns:p14="http://schemas.microsoft.com/office/powerpoint/2010/main" val="710414831"/>
       </p:ext>
     </p:extLst>
   </p:cSld>
